--- a/presentation/mui-presentation.pptx
+++ b/presentation/mui-presentation.pptx
@@ -4,6 +4,9 @@
   <p:sldMasterIdLst>
     <p:sldMasterId id="2147483648" r:id="rId1"/>
   </p:sldMasterIdLst>
+  <p:notesMasterIdLst>
+    <p:notesMasterId r:id="rId14"/>
+  </p:notesMasterIdLst>
   <p:sldIdLst>
     <p:sldId id="256" r:id="rId2"/>
     <p:sldId id="257" r:id="rId3"/>
@@ -18,9 +21,6 @@
     <p:sldId id="266" r:id="rId12"/>
     <p:sldId id="267" r:id="rId13"/>
   </p:sldIdLst>
-  <p:notesMasterIdLst>
-    <p:notesMasterId r:id="rId14"/>
-  </p:notesMasterIdLst>
   <p:sldSz cx="12192000" cy="6858000"/>
   <p:notesSz cx="6858000" cy="12192000"/>
   <p:defaultTextStyle>
@@ -115,6 +115,11 @@
       </a:defRPr>
     </a:lvl9pPr>
   </p:defaultTextStyle>
+  <p:extLst>
+    <p:ext uri="{EFAFB233-063F-42B5-8137-9DF3F51BA10A}">
+      <p15:sldGuideLst xmlns:p15="http://schemas.microsoft.com/office/powerpoint/2012/main"/>
+    </p:ext>
+  </p:extLst>
 </p:presentation>
 </file>
 
@@ -140,241 +145,17 @@
           <a:chExt cx="0" cy="0"/>
         </a:xfrm>
       </p:grpSpPr>
-      <p:sp>
-        <p:nvSpPr>
-          <p:cNvPr id="2" name="Header Placeholder 1"/>
-          <p:cNvSpPr>
-            <a:spLocks noGrp="1"/>
-          </p:cNvSpPr>
-          <p:nvPr>
-            <p:ph type="hdr" sz="quarter"/>
-          </p:nvPr>
-        </p:nvSpPr>
-        <p:spPr>
-          <a:xfrm>
-            <a:off x="0" y="0"/>
-            <a:ext cx="2971800" cy="458788"/>
-          </a:xfrm>
-          <a:prstGeom prst="rect">
-            <a:avLst/>
-          </a:prstGeom>
-        </p:spPr>
-        <p:txBody>
-          <a:bodyPr vert="horz" lIns="91440" tIns="45720" rIns="91440" bIns="45720" rtlCol="0"/>
-          <a:lstStyle>
-            <a:lvl1pPr algn="l">
-              <a:defRPr sz="1200"/>
-            </a:lvl1pPr>
-          </a:lstStyle>
-          <a:p>
-            <a:endParaRPr lang="en-US"/>
-          </a:p>
-        </p:txBody>
-      </p:sp>
-      <p:sp>
-        <p:nvSpPr>
-          <p:cNvPr id="3" name="Date Placeholder 2"/>
-          <p:cNvSpPr>
-            <a:spLocks noGrp="1"/>
-          </p:cNvSpPr>
-          <p:nvPr>
-            <p:ph type="dt" idx="1"/>
-          </p:nvPr>
-        </p:nvSpPr>
-        <p:spPr>
-          <a:xfrm>
-            <a:off x="3884613" y="0"/>
-            <a:ext cx="2971800" cy="458788"/>
-          </a:xfrm>
-          <a:prstGeom prst="rect">
-            <a:avLst/>
-          </a:prstGeom>
-        </p:spPr>
-        <p:txBody>
-          <a:bodyPr vert="horz" lIns="91440" tIns="45720" rIns="91440" bIns="45720" rtlCol="0"/>
-          <a:lstStyle>
-            <a:lvl1pPr algn="r">
-              <a:defRPr sz="1200"/>
-            </a:lvl1pPr>
-          </a:lstStyle>
-          <a:p>
-            <a:fld id="{5282F153-3F37-0F45-9E97-73ACFA13230C}" type="datetimeFigureOut">
-              <a:rPr lang="en-US"/>
-              <a:t>7/23/19</a:t>
-            </a:fld>
-            <a:endParaRPr lang="en-US"/>
-          </a:p>
-        </p:txBody>
-      </p:sp>
-      <p:sp>
-        <p:nvSpPr>
-          <p:cNvPr id="4" name="Slide Image Placeholder 3"/>
-          <p:cNvSpPr>
-            <a:spLocks noGrp="1" noRot="1" noChangeAspect="1"/>
-          </p:cNvSpPr>
-          <p:nvPr>
-            <p:ph type="sldImg" idx="2"/>
-          </p:nvPr>
-        </p:nvSpPr>
-        <p:spPr>
-          <a:xfrm>
-            <a:off x="685800" y="1143000"/>
-            <a:ext cx="5486400" cy="3086100"/>
-          </a:xfrm>
-          <a:prstGeom prst="rect">
-            <a:avLst/>
-          </a:prstGeom>
-          <a:noFill/>
-          <a:ln w="12700">
-            <a:solidFill>
-              <a:prstClr val="black"/>
-            </a:solidFill>
-          </a:ln>
-        </p:spPr>
-        <p:txBody>
-          <a:bodyPr vert="horz" lIns="91440" tIns="45720" rIns="91440" bIns="45720" rtlCol="0" anchor="ctr"/>
-          <a:lstStyle/>
-          <a:p>
-            <a:endParaRPr lang="en-US"/>
-          </a:p>
-        </p:txBody>
-      </p:sp>
-      <p:sp>
-        <p:nvSpPr>
-          <p:cNvPr id="5" name="Notes Placeholder 4"/>
-          <p:cNvSpPr>
-            <a:spLocks noGrp="1"/>
-          </p:cNvSpPr>
-          <p:nvPr>
-            <p:ph type="body" sz="quarter" idx="3"/>
-          </p:nvPr>
-        </p:nvSpPr>
-        <p:spPr>
-          <a:xfrm>
-            <a:off x="685800" y="4400550"/>
-            <a:ext cx="5486400" cy="3600450"/>
-          </a:xfrm>
-          <a:prstGeom prst="rect">
-            <a:avLst/>
-          </a:prstGeom>
-        </p:spPr>
-        <p:txBody>
-          <a:bodyPr vert="horz" lIns="91440" tIns="45720" rIns="91440" bIns="45720" rtlCol="0"/>
-          <a:lstStyle/>
-          <a:p>
-            <a:pPr lvl="0"/>
-            <a:r>
-              <a:rPr lang="en-US"/>
-              <a:t>Click to edit Master text styles</a:t>
-            </a:r>
-          </a:p>
-          <a:p>
-            <a:pPr lvl="1"/>
-            <a:r>
-              <a:rPr lang="en-US"/>
-              <a:t>Second level</a:t>
-            </a:r>
-          </a:p>
-          <a:p>
-            <a:pPr lvl="2"/>
-            <a:r>
-              <a:rPr lang="en-US"/>
-              <a:t>Third level</a:t>
-            </a:r>
-          </a:p>
-          <a:p>
-            <a:pPr lvl="3"/>
-            <a:r>
-              <a:rPr lang="en-US"/>
-              <a:t>Fourth level</a:t>
-            </a:r>
-          </a:p>
-          <a:p>
-            <a:pPr lvl="4"/>
-            <a:r>
-              <a:rPr lang="en-US"/>
-              <a:t>Fifth level</a:t>
-            </a:r>
-          </a:p>
-        </p:txBody>
-      </p:sp>
-      <p:sp>
-        <p:nvSpPr>
-          <p:cNvPr id="6" name="Footer Placeholder 5"/>
-          <p:cNvSpPr>
-            <a:spLocks noGrp="1"/>
-          </p:cNvSpPr>
-          <p:nvPr>
-            <p:ph type="ftr" sz="quarter" idx="4"/>
-          </p:nvPr>
-        </p:nvSpPr>
-        <p:spPr>
-          <a:xfrm>
-            <a:off x="0" y="8685213"/>
-            <a:ext cx="2971800" cy="458787"/>
-          </a:xfrm>
-          <a:prstGeom prst="rect">
-            <a:avLst/>
-          </a:prstGeom>
-        </p:spPr>
-        <p:txBody>
-          <a:bodyPr vert="horz" lIns="91440" tIns="45720" rIns="91440" bIns="45720" rtlCol="0" anchor="b"/>
-          <a:lstStyle>
-            <a:lvl1pPr algn="l">
-              <a:defRPr sz="1200"/>
-            </a:lvl1pPr>
-          </a:lstStyle>
-          <a:p>
-            <a:endParaRPr lang="en-US"/>
-          </a:p>
-        </p:txBody>
-      </p:sp>
-      <p:sp>
-        <p:nvSpPr>
-          <p:cNvPr id="7" name="Slide Number Placeholder 6"/>
-          <p:cNvSpPr>
-            <a:spLocks noGrp="1"/>
-          </p:cNvSpPr>
-          <p:nvPr>
-            <p:ph type="sldNum" sz="quarter" idx="5"/>
-          </p:nvPr>
-        </p:nvSpPr>
-        <p:spPr>
-          <a:xfrm>
-            <a:off x="3884613" y="8685213"/>
-            <a:ext cx="2971800" cy="458787"/>
-          </a:xfrm>
-          <a:prstGeom prst="rect">
-            <a:avLst/>
-          </a:prstGeom>
-        </p:spPr>
-        <p:txBody>
-          <a:bodyPr vert="horz" lIns="91440" tIns="45720" rIns="91440" bIns="45720" rtlCol="0" anchor="b"/>
-          <a:lstStyle>
-            <a:lvl1pPr algn="r">
-              <a:defRPr sz="1200"/>
-            </a:lvl1pPr>
-          </a:lstStyle>
-          <a:p>
-            <a:fld id="{CE5E9CC1-C706-0F49-92D6-E571CC5EEA8F}" type="slidenum">
-              <a:rPr lang="en-US"/>
-              <a:t>‹#›</a:t>
-            </a:fld>
-            <a:endParaRPr lang="en-US"/>
-          </a:p>
-        </p:txBody>
-      </p:sp>
     </p:spTree>
     <p:extLst>
       <p:ext uri="{BB962C8B-B14F-4D97-AF65-F5344CB8AC3E}">
-        <p14:creationId xmlns:p14="http://schemas.microsoft.com/office/powerpoint/2010/main" val="1024086991"/>
+        <p14:creationId xmlns:p14="http://schemas.microsoft.com/office/powerpoint/2010/main" val="1036526952"/>
       </p:ext>
     </p:extLst>
   </p:cSld>
   <p:clrMap bg1="lt1" tx1="dk1" bg2="lt2" tx2="dk2" accent1="accent1" accent2="accent2" accent3="accent3" accent4="accent4" accent5="accent5" accent6="accent6" hlink="hlink" folHlink="folHlink"/>
   <p:notesStyle>
     <a:lvl1pPr marL="0" algn="l" defTabSz="914400" rtl="0" eaLnBrk="1" latinLnBrk="0" hangingPunct="1">
-      <a:defRPr sz="1200" kern="1200">
+      <a:defRPr sz="1800" kern="1200">
         <a:solidFill>
           <a:schemeClr val="tx1"/>
         </a:solidFill>
@@ -384,7 +165,7 @@
       </a:defRPr>
     </a:lvl1pPr>
     <a:lvl2pPr marL="457200" algn="l" defTabSz="914400" rtl="0" eaLnBrk="1" latinLnBrk="0" hangingPunct="1">
-      <a:defRPr sz="1200" kern="1200">
+      <a:defRPr sz="1800" kern="1200">
         <a:solidFill>
           <a:schemeClr val="tx1"/>
         </a:solidFill>
@@ -394,7 +175,7 @@
       </a:defRPr>
     </a:lvl2pPr>
     <a:lvl3pPr marL="914400" algn="l" defTabSz="914400" rtl="0" eaLnBrk="1" latinLnBrk="0" hangingPunct="1">
-      <a:defRPr sz="1200" kern="1200">
+      <a:defRPr sz="1800" kern="1200">
         <a:solidFill>
           <a:schemeClr val="tx1"/>
         </a:solidFill>
@@ -404,7 +185,7 @@
       </a:defRPr>
     </a:lvl3pPr>
     <a:lvl4pPr marL="1371600" algn="l" defTabSz="914400" rtl="0" eaLnBrk="1" latinLnBrk="0" hangingPunct="1">
-      <a:defRPr sz="1200" kern="1200">
+      <a:defRPr sz="1800" kern="1200">
         <a:solidFill>
           <a:schemeClr val="tx1"/>
         </a:solidFill>
@@ -414,7 +195,7 @@
       </a:defRPr>
     </a:lvl4pPr>
     <a:lvl5pPr marL="1828800" algn="l" defTabSz="914400" rtl="0" eaLnBrk="1" latinLnBrk="0" hangingPunct="1">
-      <a:defRPr sz="1200" kern="1200">
+      <a:defRPr sz="1800" kern="1200">
         <a:solidFill>
           <a:schemeClr val="tx1"/>
         </a:solidFill>
@@ -424,7 +205,7 @@
       </a:defRPr>
     </a:lvl5pPr>
     <a:lvl6pPr marL="2286000" algn="l" defTabSz="914400" rtl="0" eaLnBrk="1" latinLnBrk="0" hangingPunct="1">
-      <a:defRPr sz="1200" kern="1200">
+      <a:defRPr sz="1800" kern="1200">
         <a:solidFill>
           <a:schemeClr val="tx1"/>
         </a:solidFill>
@@ -434,7 +215,7 @@
       </a:defRPr>
     </a:lvl6pPr>
     <a:lvl7pPr marL="2743200" algn="l" defTabSz="914400" rtl="0" eaLnBrk="1" latinLnBrk="0" hangingPunct="1">
-      <a:defRPr sz="1200" kern="1200">
+      <a:defRPr sz="1800" kern="1200">
         <a:solidFill>
           <a:schemeClr val="tx1"/>
         </a:solidFill>
@@ -444,7 +225,7 @@
       </a:defRPr>
     </a:lvl7pPr>
     <a:lvl8pPr marL="3200400" algn="l" defTabSz="914400" rtl="0" eaLnBrk="1" latinLnBrk="0" hangingPunct="1">
-      <a:defRPr sz="1200" kern="1200">
+      <a:defRPr sz="1800" kern="1200">
         <a:solidFill>
           <a:schemeClr val="tx1"/>
         </a:solidFill>
@@ -454,7 +235,7 @@
       </a:defRPr>
     </a:lvl8pPr>
     <a:lvl9pPr marL="3657600" algn="l" defTabSz="914400" rtl="0" eaLnBrk="1" latinLnBrk="0" hangingPunct="1">
-      <a:defRPr sz="1200" kern="1200">
+      <a:defRPr sz="1800" kern="1200">
         <a:solidFill>
           <a:schemeClr val="tx1"/>
         </a:solidFill>
@@ -518,7 +299,6 @@
 Over the next 10 minutes I'll cover: the pain that existed before component libraries, what MUI actually is, why teams reach for it, where it shines, the trade-offs, and a code comparison so the difference is concrete.
 Quick housekeeping: hold questions to the end — there's a Q&amp;A slide.</a:t>
             </a:r>
-            <a:endParaRPr lang="en-US" dirty="0"/>
           </a:p>
         </p:txBody>
       </p:sp>
@@ -609,7 +389,6 @@
 If anything misbehaves live, fall back to the screenshots — don't burn time debugging on stage.
 URL is preset on this slide; click anywhere on the headline or the URL line to launch it from Presenter View.</a:t>
             </a:r>
-            <a:endParaRPr lang="en-US" dirty="0"/>
           </a:p>
         </p:txBody>
       </p:sp>
@@ -703,7 +482,6 @@
 • 'Can I do server components?' — v5 is mostly client. v6 and ongoing work improve RSC support. Check current docs.
 Close: thank the professor, mention the demo app is on GitHub if relevant.</a:t>
             </a:r>
-            <a:endParaRPr lang="en-US" dirty="0"/>
           </a:p>
         </p:txBody>
       </p:sp>
@@ -791,7 +569,6 @@
               <a:rPr lang="en-US" dirty="0"/>
               <a:t>Closing slide. Acknowledge the team and thank the audience one more time. Offer to share contact info or the GitHub repo if anyone wants to dig into the demo source.</a:t>
             </a:r>
-            <a:endParaRPr lang="en-US" dirty="0"/>
           </a:p>
         </p:txBody>
       </p:sp>
@@ -883,7 +660,6 @@
 3) Accessibility Nightmares — getting ARIA right on a custom dropdown, modal, or menu — focus traps, keyboard nav, role attributes, screen-reader behaviour — is genuinely hard. Most teams ship inaccessible UI because doing it correctly is so expensive.
 MUI exists because every React team was solving these three problems at the same time, badly. The library is essentially the consolidated answer.</a:t>
             </a:r>
-            <a:endParaRPr lang="en-US" dirty="0"/>
           </a:p>
         </p:txBody>
       </p:sp>
@@ -974,7 +750,6 @@
 Two things to emphasize: first, these aren't just styled HTML — they're real components with internal state, keyboard handling, and ARIA. Second, it's not only primitives. MUI X adds advanced data grids, charts, and pickers, so the same library scales from a marketing button to a full analytics dashboard.
 It's TypeScript-first, customisable via the sx prop or the theme, and works with any React framework — Vite, Next.js, Remix.</a:t>
             </a:r>
-            <a:endParaRPr lang="en-US" dirty="0"/>
           </a:p>
         </p:txBody>
       </p:sp>
@@ -1065,7 +840,6 @@
 Consistency — the entire app inherits a coherent design language out of the box. Spacing, typography, colour, motion, focus states — everything follows the same theme. New devs don't argue about button heights.
 Reliability — MUI is downloaded ~5 million times a week. Every edge case you'll hit has been hit before, filed, and fixed. You're not debugging a hand-rolled tooltip's z-index issue at 2am — that work has already been done.</a:t>
             </a:r>
-            <a:endParaRPr lang="en-US" dirty="0"/>
           </a:p>
         </p:txBody>
       </p:sp>
@@ -1157,7 +931,6 @@
 Internal tools — anything user-facing inside a company where shipping speed beats pixel-perfect brand alignment. Operations dashboards, content management, support tooling, ETL configurators.
 The pattern: when users come to your app to *get work done*, not to be wowed by visual design, MUI is almost always the right call.</a:t>
             </a:r>
-            <a:endParaRPr lang="en-US" dirty="0"/>
           </a:p>
         </p:txBody>
       </p:sp>
@@ -1249,7 +1022,6 @@
 3) Out-of-the-box a11y — every component is built to WAI-ARIA spec. Focus management in dialogs, keyboard nav in menus, proper roles on toggles. You don't ship inaccessible UI by accident — accessibility is the default, not an afterthought.
 Bonus: it's TypeScript-first, with strong types end-to-end.</a:t>
             </a:r>
-            <a:endParaRPr lang="en-US" dirty="0"/>
           </a:p>
         </p:txBody>
       </p:sp>
@@ -1341,7 +1113,6 @@
 3) Customization Overhead — the big one. Once you go off the Material happy path, fighting MUI to look completely un-Material can be harder than just writing CSS from scratch. The styling system is powerful but opinionated. Deep customisation means learning the theme API, the sx prop, styled overrides, slot props — a real learning curve.
 Be honest before adopting: are you happy with the Material aesthetic, or are you going to fight it for 18 months?</a:t>
             </a:r>
-            <a:endParaRPr lang="en-US" dirty="0"/>
           </a:p>
         </p:txBody>
       </p:sp>
@@ -1432,7 +1203,6 @@
 For that work you want: Tailwind for utility-first styling, Framer Motion or GSAP for animation, and headless component libraries like Radix UI or React Aria when you need accessibility primitives without visual opinion.
 The rule of thumb: if your design language is the product, skip MUI. If your design language is a means to an end, MUI is excellent.</a:t>
             </a:r>
-            <a:endParaRPr lang="en-US" dirty="0"/>
           </a:p>
         </p:txBody>
       </p:sp>
@@ -1523,7 +1293,6 @@
 On the right: one import, one component. variant="contained" picks the filled style. color="primary" pulls from the theme — change the theme later and this button updates with no edits. It's keyboard-accessible, screen-reader friendly, has a ripple effect, and supports loading/icon/disabled states out of the box.
 This is the value proposition in a nutshell — same outcome, an order of magnitude less code, with accessibility and theming for free.</a:t>
             </a:r>
-            <a:endParaRPr lang="en-US" dirty="0"/>
           </a:p>
         </p:txBody>
       </p:sp>
@@ -1596,6 +1365,11 @@
 <file path=ppt/slideMasters/slideMaster1.xml><?xml version="1.0" encoding="utf-8"?>
 <p:sldMaster xmlns:a="http://schemas.openxmlformats.org/drawingml/2006/main" xmlns:r="http://schemas.openxmlformats.org/officeDocument/2006/relationships" xmlns:p="http://schemas.openxmlformats.org/presentationml/2006/main">
   <p:cSld>
+    <p:bg>
+      <p:bgRef idx="1001">
+        <a:schemeClr val="bg1"/>
+      </p:bgRef>
+    </p:bg>
     <p:spTree>
       <p:nvGrpSpPr>
         <p:cNvPr id="1" name=""/>
@@ -1878,6 +1652,7 @@
         <a:solidFill>
           <a:srgbClr val="FAFAFA"/>
         </a:solidFill>
+        <a:effectLst/>
       </p:bgPr>
     </p:bg>
     <p:spTree>
@@ -1918,6 +1693,13 @@
             <a:prstDash val="solid"/>
           </a:ln>
         </p:spPr>
+        <p:txBody>
+          <a:bodyPr/>
+          <a:lstStyle/>
+          <a:p>
+            <a:endParaRPr lang="th-TH"/>
+          </a:p>
+        </p:txBody>
       </p:sp>
       <p:sp>
         <p:nvSpPr>
@@ -1940,7 +1722,7 @@
           <a:bodyPr wrap="square" rtlCol="0" anchor="ctr"/>
           <a:lstStyle/>
           <a:p>
-            <a:pPr indent="0" marL="0">
+            <a:pPr marL="0" indent="0">
               <a:buNone/>
             </a:pPr>
             <a:r>
@@ -1979,7 +1761,7 @@
           <a:bodyPr wrap="square" rtlCol="0" anchor="ctr"/>
           <a:lstStyle/>
           <a:p>
-            <a:pPr indent="0" marL="0">
+            <a:pPr marL="0" indent="0">
               <a:buNone/>
             </a:pPr>
             <a:r>
@@ -2018,7 +1800,7 @@
           <a:bodyPr wrap="square" rtlCol="0" anchor="ctr"/>
           <a:lstStyle/>
           <a:p>
-            <a:pPr indent="0" marL="0">
+            <a:pPr marL="0" indent="0">
               <a:buNone/>
             </a:pPr>
             <a:r>
@@ -2057,11 +1839,11 @@
           <a:bodyPr wrap="square" rtlCol="0" anchor="ctr"/>
           <a:lstStyle/>
           <a:p>
-            <a:pPr indent="0" marL="0">
-              <a:buNone/>
-            </a:pPr>
-            <a:r>
-              <a:rPr lang="en-US" sz="1000" spc="100" kern="0" dirty="0">
+            <a:pPr marL="0" indent="0">
+              <a:buNone/>
+            </a:pPr>
+            <a:r>
+              <a:rPr lang="en-US" sz="1000" kern="0" spc="100" dirty="0">
                 <a:solidFill>
                   <a:srgbClr val="6B7280"/>
                 </a:solidFill>
@@ -2096,11 +1878,11 @@
           <a:bodyPr wrap="square" rtlCol="0" anchor="ctr"/>
           <a:lstStyle/>
           <a:p>
-            <a:pPr algn="r" indent="0" marL="0">
-              <a:buNone/>
-            </a:pPr>
-            <a:r>
-              <a:rPr lang="en-US" sz="1000" spc="200" kern="0" dirty="0">
+            <a:pPr marL="0" indent="0" algn="r">
+              <a:buNone/>
+            </a:pPr>
+            <a:r>
+              <a:rPr lang="en-US" sz="1000" kern="0" spc="200" dirty="0">
                 <a:solidFill>
                   <a:srgbClr val="6B7280"/>
                 </a:solidFill>
@@ -2130,6 +1912,7 @@
         <a:solidFill>
           <a:srgbClr val="FAFAFA"/>
         </a:solidFill>
+        <a:effectLst/>
       </p:bgPr>
     </p:bg>
     <p:spTree>
@@ -2167,11 +1950,11 @@
           <a:bodyPr wrap="square" rtlCol="0" anchor="ctr"/>
           <a:lstStyle/>
           <a:p>
-            <a:pPr indent="0" marL="0">
-              <a:buNone/>
-            </a:pPr>
-            <a:r>
-              <a:rPr lang="en-US" sz="1100" b="1" spc="400" kern="0" dirty="0">
+            <a:pPr marL="0" indent="0">
+              <a:buNone/>
+            </a:pPr>
+            <a:r>
+              <a:rPr lang="en-US" sz="1100" b="1" kern="0" spc="400" dirty="0">
                 <a:solidFill>
                   <a:srgbClr val="007FFF"/>
                 </a:solidFill>
@@ -2188,7 +1971,7 @@
       <p:sp>
         <p:nvSpPr>
           <p:cNvPr id="3" name="Text 1">
-            <a:hlinkClick r:id="rId1" tooltip="Open the demo"/>
+            <a:hlinkClick r:id="rId3" tooltip="Open the demo"/>
           </p:cNvPr>
           <p:cNvSpPr/>
           <p:nvPr/>
@@ -2208,7 +1991,7 @@
           <a:bodyPr wrap="square" rtlCol="0" anchor="ctr"/>
           <a:lstStyle/>
           <a:p>
-            <a:pPr algn="ctr" indent="0" marL="0">
+            <a:pPr marL="0" indent="0" algn="ctr">
               <a:buNone/>
             </a:pPr>
             <a:r>
@@ -2219,7 +2002,7 @@
                 <a:latin typeface="Segoe UI" pitchFamily="34" charset="0"/>
                 <a:ea typeface="Segoe UI" pitchFamily="34" charset="-122"/>
                 <a:cs typeface="Segoe UI" pitchFamily="34" charset="-120"/>
-                <a:hlinkClick r:id="rId1" invalidUrl="" action="" tgtFrame="" tooltip="Open the demo" history="1" highlightClick="0" endSnd="0">
+                <a:hlinkClick r:id="rId4" tooltip="Open the demo">
                   <a:extLst>
                     <a:ext uri="{A12FA001-AC4F-418D-AE19-62706E023703}">
                       <ahyp:hlinkClr xmlns:ahyp="http://schemas.microsoft.com/office/drawing/2018/hyperlinkcolor" val="tx"/>
@@ -2257,11 +2040,18 @@
             <a:prstDash val="solid"/>
           </a:ln>
         </p:spPr>
+        <p:txBody>
+          <a:bodyPr/>
+          <a:lstStyle/>
+          <a:p>
+            <a:endParaRPr lang="th-TH"/>
+          </a:p>
+        </p:txBody>
       </p:sp>
       <p:sp>
         <p:nvSpPr>
           <p:cNvPr id="5" name="Text 3">
-            <a:hlinkClick r:id="rId2" tooltip="Open the demo"/>
+            <a:hlinkClick r:id="rId4" tooltip="Open the demo"/>
           </p:cNvPr>
           <p:cNvSpPr/>
           <p:nvPr/>
@@ -2281,9 +2071,7 @@
           <a:bodyPr wrap="square" rtlCol="0" anchor="ctr"/>
           <a:lstStyle/>
           <a:p>
-            <a:pPr algn="ctr" indent="0" marL="0">
-              <a:buNone/>
-            </a:pPr>
+            <a:pPr algn="ctr"/>
             <a:r>
               <a:rPr lang="en-US" sz="1600" u="sng" dirty="0">
                 <a:solidFill>
@@ -2292,15 +2080,8 @@
                 <a:latin typeface="Consolas" pitchFamily="34" charset="0"/>
                 <a:ea typeface="Consolas" pitchFamily="34" charset="-122"/>
                 <a:cs typeface="Consolas" pitchFamily="34" charset="-120"/>
-                <a:hlinkClick r:id="rId2" invalidUrl="" action="" tgtFrame="" tooltip="Open the demo" history="1" highlightClick="0" endSnd="0">
-                  <a:extLst>
-                    <a:ext uri="{A12FA001-AC4F-418D-AE19-62706E023703}">
-                      <ahyp:hlinkClr xmlns:ahyp="http://schemas.microsoft.com/office/drawing/2018/hyperlinkcolor" val="tx"/>
-                    </a:ext>
-                  </a:extLst>
-                </a:hlinkClick>
-              </a:rPr>
-              <a:t>https://your-demo.up.railway.app</a:t>
+              </a:rPr>
+              <a:t>https://mui-showcase-production.up.railway.app/</a:t>
             </a:r>
             <a:endParaRPr lang="en-US" sz="1600" dirty="0"/>
           </a:p>
@@ -2327,11 +2108,11 @@
           <a:bodyPr wrap="square" rtlCol="0" anchor="ctr"/>
           <a:lstStyle/>
           <a:p>
-            <a:pPr algn="r" indent="0" marL="0">
-              <a:buNone/>
-            </a:pPr>
-            <a:r>
-              <a:rPr lang="en-US" sz="1000" spc="200" kern="0" dirty="0">
+            <a:pPr marL="0" indent="0" algn="r">
+              <a:buNone/>
+            </a:pPr>
+            <a:r>
+              <a:rPr lang="en-US" sz="1000" kern="0" spc="200" dirty="0">
                 <a:solidFill>
                   <a:srgbClr val="6B7280"/>
                 </a:solidFill>
@@ -2361,6 +2142,7 @@
         <a:solidFill>
           <a:srgbClr val="FAFAFA"/>
         </a:solidFill>
+        <a:effectLst/>
       </p:bgPr>
     </p:bg>
     <p:spTree>
@@ -2401,6 +2183,13 @@
             <a:prstDash val="solid"/>
           </a:ln>
         </p:spPr>
+        <p:txBody>
+          <a:bodyPr/>
+          <a:lstStyle/>
+          <a:p>
+            <a:endParaRPr lang="th-TH"/>
+          </a:p>
+        </p:txBody>
       </p:sp>
       <p:sp>
         <p:nvSpPr>
@@ -2423,7 +2212,7 @@
           <a:bodyPr wrap="square" rtlCol="0" anchor="ctr"/>
           <a:lstStyle/>
           <a:p>
-            <a:pPr algn="ctr" indent="0" marL="0">
+            <a:pPr marL="0" indent="0" algn="ctr">
               <a:buNone/>
             </a:pPr>
             <a:r>
@@ -2462,7 +2251,7 @@
           <a:bodyPr wrap="square" rtlCol="0" anchor="ctr"/>
           <a:lstStyle/>
           <a:p>
-            <a:pPr algn="ctr" indent="0" marL="0">
+            <a:pPr marL="0" indent="0" algn="ctr">
               <a:buNone/>
             </a:pPr>
             <a:r>
@@ -2501,11 +2290,11 @@
           <a:bodyPr wrap="square" rtlCol="0" anchor="ctr"/>
           <a:lstStyle/>
           <a:p>
-            <a:pPr algn="r" indent="0" marL="0">
-              <a:buNone/>
-            </a:pPr>
-            <a:r>
-              <a:rPr lang="en-US" sz="1000" spc="200" kern="0" dirty="0">
+            <a:pPr marL="0" indent="0" algn="r">
+              <a:buNone/>
+            </a:pPr>
+            <a:r>
+              <a:rPr lang="en-US" sz="1000" kern="0" spc="200" dirty="0">
                 <a:solidFill>
                   <a:srgbClr val="6B7280"/>
                 </a:solidFill>
@@ -2535,6 +2324,7 @@
         <a:solidFill>
           <a:srgbClr val="FAFAFA"/>
         </a:solidFill>
+        <a:effectLst/>
       </p:bgPr>
     </p:bg>
     <p:spTree>
@@ -2572,11 +2362,11 @@
           <a:bodyPr wrap="square" rtlCol="0" anchor="ctr"/>
           <a:lstStyle/>
           <a:p>
-            <a:pPr indent="0" marL="0">
-              <a:buNone/>
-            </a:pPr>
-            <a:r>
-              <a:rPr lang="en-US" sz="1100" b="1" spc="400" kern="0" dirty="0">
+            <a:pPr marL="0" indent="0">
+              <a:buNone/>
+            </a:pPr>
+            <a:r>
+              <a:rPr lang="en-US" sz="1100" b="1" kern="0" spc="400" dirty="0">
                 <a:solidFill>
                   <a:srgbClr val="007FFF"/>
                 </a:solidFill>
@@ -2611,7 +2401,7 @@
           <a:bodyPr wrap="square" rtlCol="0" anchor="ctr"/>
           <a:lstStyle/>
           <a:p>
-            <a:pPr indent="0" marL="0">
+            <a:pPr marL="0" indent="0">
               <a:buNone/>
             </a:pPr>
             <a:r>
@@ -2650,7 +2440,7 @@
           <a:bodyPr wrap="square" rtlCol="0" anchor="ctr"/>
           <a:lstStyle/>
           <a:p>
-            <a:pPr algn="ctr" indent="0" marL="0">
+            <a:pPr marL="0" indent="0" algn="ctr">
               <a:buNone/>
             </a:pPr>
             <a:r>
@@ -2689,7 +2479,7 @@
           <a:bodyPr wrap="square" rtlCol="0" anchor="ctr"/>
           <a:lstStyle/>
           <a:p>
-            <a:pPr algn="ctr" indent="0" marL="0">
+            <a:pPr marL="0" indent="0" algn="ctr">
               <a:buNone/>
             </a:pPr>
             <a:r>
@@ -2731,6 +2521,13 @@
             <a:prstDash val="solid"/>
           </a:ln>
         </p:spPr>
+        <p:txBody>
+          <a:bodyPr/>
+          <a:lstStyle/>
+          <a:p>
+            <a:endParaRPr lang="th-TH"/>
+          </a:p>
+        </p:txBody>
       </p:sp>
       <p:sp>
         <p:nvSpPr>
@@ -2753,11 +2550,11 @@
           <a:bodyPr wrap="square" rtlCol="0" anchor="ctr"/>
           <a:lstStyle/>
           <a:p>
-            <a:pPr algn="ctr" indent="0" marL="0">
-              <a:buNone/>
-            </a:pPr>
-            <a:r>
-              <a:rPr lang="en-US" sz="1200" spc="400" kern="0" dirty="0">
+            <a:pPr marL="0" indent="0" algn="ctr">
+              <a:buNone/>
+            </a:pPr>
+            <a:r>
+              <a:rPr lang="en-US" sz="1200" kern="0" spc="400" dirty="0">
                 <a:solidFill>
                   <a:srgbClr val="6B7280"/>
                 </a:solidFill>
@@ -2792,11 +2589,11 @@
           <a:bodyPr wrap="square" rtlCol="0" anchor="ctr"/>
           <a:lstStyle/>
           <a:p>
-            <a:pPr algn="r" indent="0" marL="0">
-              <a:buNone/>
-            </a:pPr>
-            <a:r>
-              <a:rPr lang="en-US" sz="1000" spc="200" kern="0" dirty="0">
+            <a:pPr marL="0" indent="0" algn="r">
+              <a:buNone/>
+            </a:pPr>
+            <a:r>
+              <a:rPr lang="en-US" sz="1000" kern="0" spc="200" dirty="0">
                 <a:solidFill>
                   <a:srgbClr val="6B7280"/>
                 </a:solidFill>
@@ -2826,6 +2623,7 @@
         <a:solidFill>
           <a:srgbClr val="FAFAFA"/>
         </a:solidFill>
+        <a:effectLst/>
       </p:bgPr>
     </p:bg>
     <p:spTree>
@@ -2863,11 +2661,11 @@
           <a:bodyPr wrap="square" rtlCol="0" anchor="ctr"/>
           <a:lstStyle/>
           <a:p>
-            <a:pPr indent="0" marL="0">
-              <a:buNone/>
-            </a:pPr>
-            <a:r>
-              <a:rPr lang="en-US" sz="1100" b="1" spc="400" kern="0" dirty="0">
+            <a:pPr marL="0" indent="0">
+              <a:buNone/>
+            </a:pPr>
+            <a:r>
+              <a:rPr lang="en-US" sz="1100" b="1" kern="0" spc="400" dirty="0">
                 <a:solidFill>
                   <a:srgbClr val="007FFF"/>
                 </a:solidFill>
@@ -2902,7 +2700,7 @@
           <a:bodyPr wrap="square" rtlCol="0" anchor="ctr"/>
           <a:lstStyle/>
           <a:p>
-            <a:pPr indent="0" marL="0">
+            <a:pPr marL="0" indent="0">
               <a:buNone/>
             </a:pPr>
             <a:r>
@@ -2941,7 +2739,7 @@
           <a:bodyPr wrap="square" rtlCol="0" anchor="ctr"/>
           <a:lstStyle/>
           <a:p>
-            <a:pPr indent="0" marL="0">
+            <a:pPr marL="0" indent="0">
               <a:buNone/>
             </a:pPr>
             <a:r>
@@ -2980,7 +2778,7 @@
           <a:bodyPr wrap="square" rtlCol="0" anchor="ctr"/>
           <a:lstStyle/>
           <a:p>
-            <a:pPr indent="0" marL="0">
+            <a:pPr marL="0" indent="0">
               <a:buNone/>
             </a:pPr>
             <a:r>
@@ -3020,6 +2818,13 @@
             <a:prstDash val="solid"/>
           </a:ln>
         </p:spPr>
+        <p:txBody>
+          <a:bodyPr/>
+          <a:lstStyle/>
+          <a:p>
+            <a:endParaRPr lang="th-TH"/>
+          </a:p>
+        </p:txBody>
       </p:sp>
       <p:sp>
         <p:nvSpPr>
@@ -3042,7 +2847,7 @@
           <a:bodyPr wrap="square" rtlCol="0" anchor="ctr"/>
           <a:lstStyle/>
           <a:p>
-            <a:pPr indent="0" marL="0">
+            <a:pPr marL="0" indent="0">
               <a:buNone/>
             </a:pPr>
             <a:r>
@@ -3081,7 +2886,7 @@
           <a:bodyPr wrap="square" rtlCol="0" anchor="ctr"/>
           <a:lstStyle/>
           <a:p>
-            <a:pPr indent="0" marL="0">
+            <a:pPr marL="0" indent="0">
               <a:buNone/>
             </a:pPr>
             <a:r>
@@ -3121,6 +2926,13 @@
             <a:prstDash val="solid"/>
           </a:ln>
         </p:spPr>
+        <p:txBody>
+          <a:bodyPr/>
+          <a:lstStyle/>
+          <a:p>
+            <a:endParaRPr lang="th-TH"/>
+          </a:p>
+        </p:txBody>
       </p:sp>
       <p:sp>
         <p:nvSpPr>
@@ -3143,7 +2955,7 @@
           <a:bodyPr wrap="square" rtlCol="0" anchor="ctr"/>
           <a:lstStyle/>
           <a:p>
-            <a:pPr indent="0" marL="0">
+            <a:pPr marL="0" indent="0">
               <a:buNone/>
             </a:pPr>
             <a:r>
@@ -3182,7 +2994,7 @@
           <a:bodyPr wrap="square" rtlCol="0" anchor="ctr"/>
           <a:lstStyle/>
           <a:p>
-            <a:pPr indent="0" marL="0">
+            <a:pPr marL="0" indent="0">
               <a:buNone/>
             </a:pPr>
             <a:r>
@@ -3222,6 +3034,13 @@
             <a:prstDash val="solid"/>
           </a:ln>
         </p:spPr>
+        <p:txBody>
+          <a:bodyPr/>
+          <a:lstStyle/>
+          <a:p>
+            <a:endParaRPr lang="th-TH"/>
+          </a:p>
+        </p:txBody>
       </p:sp>
       <p:sp>
         <p:nvSpPr>
@@ -3244,11 +3063,11 @@
           <a:bodyPr wrap="square" rtlCol="0" anchor="ctr"/>
           <a:lstStyle/>
           <a:p>
-            <a:pPr algn="r" indent="0" marL="0">
-              <a:buNone/>
-            </a:pPr>
-            <a:r>
-              <a:rPr lang="en-US" sz="1000" spc="200" kern="0" dirty="0">
+            <a:pPr marL="0" indent="0" algn="r">
+              <a:buNone/>
+            </a:pPr>
+            <a:r>
+              <a:rPr lang="en-US" sz="1000" kern="0" spc="200" dirty="0">
                 <a:solidFill>
                   <a:srgbClr val="6B7280"/>
                 </a:solidFill>
@@ -3278,6 +3097,7 @@
         <a:solidFill>
           <a:srgbClr val="FAFAFA"/>
         </a:solidFill>
+        <a:effectLst/>
       </p:bgPr>
     </p:bg>
     <p:spTree>
@@ -3315,11 +3135,11 @@
           <a:bodyPr wrap="square" rtlCol="0" anchor="ctr"/>
           <a:lstStyle/>
           <a:p>
-            <a:pPr indent="0" marL="0">
-              <a:buNone/>
-            </a:pPr>
-            <a:r>
-              <a:rPr lang="en-US" sz="1100" b="1" spc="400" kern="0" dirty="0">
+            <a:pPr marL="0" indent="0">
+              <a:buNone/>
+            </a:pPr>
+            <a:r>
+              <a:rPr lang="en-US" sz="1100" b="1" kern="0" spc="400" dirty="0">
                 <a:solidFill>
                   <a:srgbClr val="007FFF"/>
                 </a:solidFill>
@@ -3354,7 +3174,7 @@
           <a:bodyPr wrap="square" rtlCol="0" anchor="ctr"/>
           <a:lstStyle/>
           <a:p>
-            <a:pPr indent="0" marL="0">
+            <a:pPr marL="0" indent="0">
               <a:buNone/>
             </a:pPr>
             <a:r>
@@ -3398,6 +3218,13 @@
             <a:prstDash val="solid"/>
           </a:ln>
         </p:spPr>
+        <p:txBody>
+          <a:bodyPr/>
+          <a:lstStyle/>
+          <a:p>
+            <a:endParaRPr lang="th-TH"/>
+          </a:p>
+        </p:txBody>
       </p:sp>
       <p:sp>
         <p:nvSpPr>
@@ -3420,7 +3247,7 @@
           <a:bodyPr wrap="square" rtlCol="0" anchor="ctr"/>
           <a:lstStyle/>
           <a:p>
-            <a:pPr algn="ctr" indent="0" marL="0">
+            <a:pPr marL="0" indent="0" algn="ctr">
               <a:buNone/>
             </a:pPr>
             <a:r>
@@ -3459,7 +3286,7 @@
           <a:bodyPr wrap="square" rtlCol="0" anchor="ctr"/>
           <a:lstStyle/>
           <a:p>
-            <a:pPr algn="ctr" indent="0" marL="0">
+            <a:pPr marL="0" indent="0" algn="ctr">
               <a:buNone/>
             </a:pPr>
             <a:r>
@@ -3498,7 +3325,7 @@
           <a:bodyPr wrap="square" rtlCol="0" anchor="ctr"/>
           <a:lstStyle/>
           <a:p>
-            <a:pPr algn="ctr" indent="0" marL="0">
+            <a:pPr marL="0" indent="0" algn="ctr">
               <a:buNone/>
             </a:pPr>
             <a:r>
@@ -3537,11 +3364,11 @@
           <a:bodyPr wrap="square" rtlCol="0" anchor="ctr"/>
           <a:lstStyle/>
           <a:p>
-            <a:pPr algn="r" indent="0" marL="0">
-              <a:buNone/>
-            </a:pPr>
-            <a:r>
-              <a:rPr lang="en-US" sz="1000" spc="200" kern="0" dirty="0">
+            <a:pPr marL="0" indent="0" algn="r">
+              <a:buNone/>
+            </a:pPr>
+            <a:r>
+              <a:rPr lang="en-US" sz="1000" kern="0" spc="200" dirty="0">
                 <a:solidFill>
                   <a:srgbClr val="6B7280"/>
                 </a:solidFill>
@@ -3571,6 +3398,7 @@
         <a:solidFill>
           <a:srgbClr val="FAFAFA"/>
         </a:solidFill>
+        <a:effectLst/>
       </p:bgPr>
     </p:bg>
     <p:spTree>
@@ -3608,11 +3436,11 @@
           <a:bodyPr wrap="square" rtlCol="0" anchor="ctr"/>
           <a:lstStyle/>
           <a:p>
-            <a:pPr indent="0" marL="0">
-              <a:buNone/>
-            </a:pPr>
-            <a:r>
-              <a:rPr lang="en-US" sz="1100" b="1" spc="400" kern="0" dirty="0">
+            <a:pPr marL="0" indent="0">
+              <a:buNone/>
+            </a:pPr>
+            <a:r>
+              <a:rPr lang="en-US" sz="1100" b="1" kern="0" spc="400" dirty="0">
                 <a:solidFill>
                   <a:srgbClr val="007FFF"/>
                 </a:solidFill>
@@ -3647,7 +3475,7 @@
           <a:bodyPr wrap="square" rtlCol="0" anchor="ctr"/>
           <a:lstStyle/>
           <a:p>
-            <a:pPr indent="0" marL="0">
+            <a:pPr marL="0" indent="0">
               <a:buNone/>
             </a:pPr>
             <a:r>
@@ -3686,7 +3514,7 @@
           <a:bodyPr wrap="square" rtlCol="0" anchor="ctr"/>
           <a:lstStyle/>
           <a:p>
-            <a:pPr algn="ctr" indent="0" marL="0">
+            <a:pPr marL="0" indent="0" algn="ctr">
               <a:buNone/>
             </a:pPr>
             <a:r>
@@ -3700,9 +3528,6 @@
               </a:rPr>
               <a:t>Velocity.  </a:t>
             </a:r>
-            <a:pPr algn="ctr" indent="0" marL="0">
-              <a:buNone/>
-            </a:pPr>
             <a:r>
               <a:rPr lang="en-US" sz="6000" b="1" dirty="0">
                 <a:solidFill>
@@ -3714,9 +3539,6 @@
               </a:rPr>
               <a:t>Consistency.  </a:t>
             </a:r>
-            <a:pPr algn="ctr" indent="0" marL="0">
-              <a:buNone/>
-            </a:pPr>
             <a:r>
               <a:rPr lang="en-US" sz="6000" b="1" dirty="0">
                 <a:solidFill>
@@ -3753,11 +3575,11 @@
           <a:bodyPr wrap="square" rtlCol="0" anchor="ctr"/>
           <a:lstStyle/>
           <a:p>
-            <a:pPr algn="r" indent="0" marL="0">
-              <a:buNone/>
-            </a:pPr>
-            <a:r>
-              <a:rPr lang="en-US" sz="1000" spc="200" kern="0" dirty="0">
+            <a:pPr marL="0" indent="0" algn="r">
+              <a:buNone/>
+            </a:pPr>
+            <a:r>
+              <a:rPr lang="en-US" sz="1000" kern="0" spc="200" dirty="0">
                 <a:solidFill>
                   <a:srgbClr val="6B7280"/>
                 </a:solidFill>
@@ -3787,6 +3609,7 @@
         <a:solidFill>
           <a:srgbClr val="FAFAFA"/>
         </a:solidFill>
+        <a:effectLst/>
       </p:bgPr>
     </p:bg>
     <p:spTree>
@@ -3824,11 +3647,11 @@
           <a:bodyPr wrap="square" rtlCol="0" anchor="ctr"/>
           <a:lstStyle/>
           <a:p>
-            <a:pPr indent="0" marL="0">
-              <a:buNone/>
-            </a:pPr>
-            <a:r>
-              <a:rPr lang="en-US" sz="1100" b="1" spc="400" kern="0" dirty="0">
+            <a:pPr marL="0" indent="0">
+              <a:buNone/>
+            </a:pPr>
+            <a:r>
+              <a:rPr lang="en-US" sz="1100" b="1" kern="0" spc="400" dirty="0">
                 <a:solidFill>
                   <a:srgbClr val="007FFF"/>
                 </a:solidFill>
@@ -3863,7 +3686,7 @@
           <a:bodyPr wrap="square" rtlCol="0" anchor="ctr"/>
           <a:lstStyle/>
           <a:p>
-            <a:pPr indent="0" marL="0">
+            <a:pPr marL="0" indent="0">
               <a:buNone/>
             </a:pPr>
             <a:r>
@@ -3907,6 +3730,13 @@
             <a:prstDash val="solid"/>
           </a:ln>
         </p:spPr>
+        <p:txBody>
+          <a:bodyPr/>
+          <a:lstStyle/>
+          <a:p>
+            <a:endParaRPr lang="th-TH"/>
+          </a:p>
+        </p:txBody>
       </p:sp>
       <p:sp>
         <p:nvSpPr>
@@ -3929,11 +3759,11 @@
           <a:bodyPr wrap="square" rtlCol="0" anchor="ctr"/>
           <a:lstStyle/>
           <a:p>
-            <a:pPr indent="0" marL="0">
-              <a:buNone/>
-            </a:pPr>
-            <a:r>
-              <a:rPr lang="en-US" sz="1100" b="1" spc="400" kern="0" dirty="0">
+            <a:pPr marL="0" indent="0">
+              <a:buNone/>
+            </a:pPr>
+            <a:r>
+              <a:rPr lang="en-US" sz="1100" b="1" kern="0" spc="400" dirty="0">
                 <a:solidFill>
                   <a:srgbClr val="007FFF"/>
                 </a:solidFill>
@@ -3968,7 +3798,7 @@
           <a:bodyPr wrap="square" rtlCol="0" anchor="ctr"/>
           <a:lstStyle/>
           <a:p>
-            <a:pPr indent="0" marL="0">
+            <a:pPr marL="0" indent="0">
               <a:buNone/>
             </a:pPr>
             <a:r>
@@ -4007,7 +3837,7 @@
           <a:bodyPr wrap="square" rtlCol="0" anchor="ctr"/>
           <a:lstStyle/>
           <a:p>
-            <a:pPr indent="0" marL="0">
+            <a:pPr marL="0" indent="0">
               <a:buNone/>
             </a:pPr>
             <a:r>
@@ -4051,6 +3881,13 @@
             <a:prstDash val="solid"/>
           </a:ln>
         </p:spPr>
+        <p:txBody>
+          <a:bodyPr/>
+          <a:lstStyle/>
+          <a:p>
+            <a:endParaRPr lang="th-TH"/>
+          </a:p>
+        </p:txBody>
       </p:sp>
       <p:sp>
         <p:nvSpPr>
@@ -4073,11 +3910,11 @@
           <a:bodyPr wrap="square" rtlCol="0" anchor="ctr"/>
           <a:lstStyle/>
           <a:p>
-            <a:pPr indent="0" marL="0">
-              <a:buNone/>
-            </a:pPr>
-            <a:r>
-              <a:rPr lang="en-US" sz="1100" b="1" spc="400" kern="0" dirty="0">
+            <a:pPr marL="0" indent="0">
+              <a:buNone/>
+            </a:pPr>
+            <a:r>
+              <a:rPr lang="en-US" sz="1100" b="1" kern="0" spc="400" dirty="0">
                 <a:solidFill>
                   <a:srgbClr val="007FFF"/>
                 </a:solidFill>
@@ -4112,7 +3949,7 @@
           <a:bodyPr wrap="square" rtlCol="0" anchor="ctr"/>
           <a:lstStyle/>
           <a:p>
-            <a:pPr indent="0" marL="0">
+            <a:pPr marL="0" indent="0">
               <a:buNone/>
             </a:pPr>
             <a:r>
@@ -4151,7 +3988,7 @@
           <a:bodyPr wrap="square" rtlCol="0" anchor="ctr"/>
           <a:lstStyle/>
           <a:p>
-            <a:pPr indent="0" marL="0">
+            <a:pPr marL="0" indent="0">
               <a:buNone/>
             </a:pPr>
             <a:r>
@@ -4195,6 +4032,13 @@
             <a:prstDash val="solid"/>
           </a:ln>
         </p:spPr>
+        <p:txBody>
+          <a:bodyPr/>
+          <a:lstStyle/>
+          <a:p>
+            <a:endParaRPr lang="th-TH"/>
+          </a:p>
+        </p:txBody>
       </p:sp>
       <p:sp>
         <p:nvSpPr>
@@ -4217,11 +4061,11 @@
           <a:bodyPr wrap="square" rtlCol="0" anchor="ctr"/>
           <a:lstStyle/>
           <a:p>
-            <a:pPr indent="0" marL="0">
-              <a:buNone/>
-            </a:pPr>
-            <a:r>
-              <a:rPr lang="en-US" sz="1100" b="1" spc="400" kern="0" dirty="0">
+            <a:pPr marL="0" indent="0">
+              <a:buNone/>
+            </a:pPr>
+            <a:r>
+              <a:rPr lang="en-US" sz="1100" b="1" kern="0" spc="400" dirty="0">
                 <a:solidFill>
                   <a:srgbClr val="007FFF"/>
                 </a:solidFill>
@@ -4256,7 +4100,7 @@
           <a:bodyPr wrap="square" rtlCol="0" anchor="ctr"/>
           <a:lstStyle/>
           <a:p>
-            <a:pPr indent="0" marL="0">
+            <a:pPr marL="0" indent="0">
               <a:buNone/>
             </a:pPr>
             <a:r>
@@ -4295,7 +4139,7 @@
           <a:bodyPr wrap="square" rtlCol="0" anchor="ctr"/>
           <a:lstStyle/>
           <a:p>
-            <a:pPr indent="0" marL="0">
+            <a:pPr marL="0" indent="0">
               <a:buNone/>
             </a:pPr>
             <a:r>
@@ -4334,11 +4178,11 @@
           <a:bodyPr wrap="square" rtlCol="0" anchor="ctr"/>
           <a:lstStyle/>
           <a:p>
-            <a:pPr algn="r" indent="0" marL="0">
-              <a:buNone/>
-            </a:pPr>
-            <a:r>
-              <a:rPr lang="en-US" sz="1000" spc="200" kern="0" dirty="0">
+            <a:pPr marL="0" indent="0" algn="r">
+              <a:buNone/>
+            </a:pPr>
+            <a:r>
+              <a:rPr lang="en-US" sz="1000" kern="0" spc="200" dirty="0">
                 <a:solidFill>
                   <a:srgbClr val="6B7280"/>
                 </a:solidFill>
@@ -4368,6 +4212,7 @@
         <a:solidFill>
           <a:srgbClr val="FAFAFA"/>
         </a:solidFill>
+        <a:effectLst/>
       </p:bgPr>
     </p:bg>
     <p:spTree>
@@ -4405,11 +4250,11 @@
           <a:bodyPr wrap="square" rtlCol="0" anchor="ctr"/>
           <a:lstStyle/>
           <a:p>
-            <a:pPr indent="0" marL="0">
-              <a:buNone/>
-            </a:pPr>
-            <a:r>
-              <a:rPr lang="en-US" sz="1100" b="1" spc="400" kern="0" dirty="0">
+            <a:pPr marL="0" indent="0">
+              <a:buNone/>
+            </a:pPr>
+            <a:r>
+              <a:rPr lang="en-US" sz="1100" b="1" kern="0" spc="400" dirty="0">
                 <a:solidFill>
                   <a:srgbClr val="007FFF"/>
                 </a:solidFill>
@@ -4444,7 +4289,7 @@
           <a:bodyPr wrap="square" rtlCol="0" anchor="ctr"/>
           <a:lstStyle/>
           <a:p>
-            <a:pPr indent="0" marL="0">
+            <a:pPr marL="0" indent="0">
               <a:buNone/>
             </a:pPr>
             <a:r>
@@ -4483,7 +4328,7 @@
           <a:bodyPr wrap="square" rtlCol="0" anchor="ctr"/>
           <a:lstStyle/>
           <a:p>
-            <a:pPr indent="0" marL="0">
+            <a:pPr marL="0" indent="0">
               <a:buNone/>
             </a:pPr>
             <a:r>
@@ -4522,7 +4367,7 @@
           <a:bodyPr wrap="square" rtlCol="0" anchor="ctr"/>
           <a:lstStyle/>
           <a:p>
-            <a:pPr indent="0" marL="0">
+            <a:pPr marL="0" indent="0">
               <a:buNone/>
             </a:pPr>
             <a:r>
@@ -4562,6 +4407,13 @@
             <a:prstDash val="solid"/>
           </a:ln>
         </p:spPr>
+        <p:txBody>
+          <a:bodyPr/>
+          <a:lstStyle/>
+          <a:p>
+            <a:endParaRPr lang="th-TH"/>
+          </a:p>
+        </p:txBody>
       </p:sp>
       <p:sp>
         <p:nvSpPr>
@@ -4584,7 +4436,7 @@
           <a:bodyPr wrap="square" rtlCol="0" anchor="ctr"/>
           <a:lstStyle/>
           <a:p>
-            <a:pPr indent="0" marL="0">
+            <a:pPr marL="0" indent="0">
               <a:buNone/>
             </a:pPr>
             <a:r>
@@ -4623,7 +4475,7 @@
           <a:bodyPr wrap="square" rtlCol="0" anchor="ctr"/>
           <a:lstStyle/>
           <a:p>
-            <a:pPr indent="0" marL="0">
+            <a:pPr marL="0" indent="0">
               <a:buNone/>
             </a:pPr>
             <a:r>
@@ -4663,6 +4515,13 @@
             <a:prstDash val="solid"/>
           </a:ln>
         </p:spPr>
+        <p:txBody>
+          <a:bodyPr/>
+          <a:lstStyle/>
+          <a:p>
+            <a:endParaRPr lang="th-TH"/>
+          </a:p>
+        </p:txBody>
       </p:sp>
       <p:sp>
         <p:nvSpPr>
@@ -4685,7 +4544,7 @@
           <a:bodyPr wrap="square" rtlCol="0" anchor="ctr"/>
           <a:lstStyle/>
           <a:p>
-            <a:pPr indent="0" marL="0">
+            <a:pPr marL="0" indent="0">
               <a:buNone/>
             </a:pPr>
             <a:r>
@@ -4724,7 +4583,7 @@
           <a:bodyPr wrap="square" rtlCol="0" anchor="ctr"/>
           <a:lstStyle/>
           <a:p>
-            <a:pPr indent="0" marL="0">
+            <a:pPr marL="0" indent="0">
               <a:buNone/>
             </a:pPr>
             <a:r>
@@ -4764,6 +4623,13 @@
             <a:prstDash val="solid"/>
           </a:ln>
         </p:spPr>
+        <p:txBody>
+          <a:bodyPr/>
+          <a:lstStyle/>
+          <a:p>
+            <a:endParaRPr lang="th-TH"/>
+          </a:p>
+        </p:txBody>
       </p:sp>
       <p:sp>
         <p:nvSpPr>
@@ -4786,11 +4652,11 @@
           <a:bodyPr wrap="square" rtlCol="0" anchor="ctr"/>
           <a:lstStyle/>
           <a:p>
-            <a:pPr algn="r" indent="0" marL="0">
-              <a:buNone/>
-            </a:pPr>
-            <a:r>
-              <a:rPr lang="en-US" sz="1000" spc="200" kern="0" dirty="0">
+            <a:pPr marL="0" indent="0" algn="r">
+              <a:buNone/>
+            </a:pPr>
+            <a:r>
+              <a:rPr lang="en-US" sz="1000" kern="0" spc="200" dirty="0">
                 <a:solidFill>
                   <a:srgbClr val="6B7280"/>
                 </a:solidFill>
@@ -4820,6 +4686,7 @@
         <a:solidFill>
           <a:srgbClr val="FAFAFA"/>
         </a:solidFill>
+        <a:effectLst/>
       </p:bgPr>
     </p:bg>
     <p:spTree>
@@ -4857,11 +4724,11 @@
           <a:bodyPr wrap="square" rtlCol="0" anchor="ctr"/>
           <a:lstStyle/>
           <a:p>
-            <a:pPr indent="0" marL="0">
-              <a:buNone/>
-            </a:pPr>
-            <a:r>
-              <a:rPr lang="en-US" sz="1100" b="1" spc="400" kern="0" dirty="0">
+            <a:pPr marL="0" indent="0">
+              <a:buNone/>
+            </a:pPr>
+            <a:r>
+              <a:rPr lang="en-US" sz="1100" b="1" kern="0" spc="400" dirty="0">
                 <a:solidFill>
                   <a:srgbClr val="007FFF"/>
                 </a:solidFill>
@@ -4896,7 +4763,7 @@
           <a:bodyPr wrap="square" rtlCol="0" anchor="ctr"/>
           <a:lstStyle/>
           <a:p>
-            <a:pPr indent="0" marL="0">
+            <a:pPr marL="0" indent="0">
               <a:buNone/>
             </a:pPr>
             <a:r>
@@ -4935,7 +4802,7 @@
           <a:bodyPr wrap="square" rtlCol="0" anchor="ctr"/>
           <a:lstStyle/>
           <a:p>
-            <a:pPr indent="0" marL="0">
+            <a:pPr marL="0" indent="0">
               <a:buNone/>
             </a:pPr>
             <a:r>
@@ -4974,7 +4841,7 @@
           <a:bodyPr wrap="square" rtlCol="0" anchor="ctr"/>
           <a:lstStyle/>
           <a:p>
-            <a:pPr indent="0" marL="0">
+            <a:pPr marL="0" indent="0">
               <a:buNone/>
             </a:pPr>
             <a:r>
@@ -5014,6 +4881,13 @@
             <a:prstDash val="solid"/>
           </a:ln>
         </p:spPr>
+        <p:txBody>
+          <a:bodyPr/>
+          <a:lstStyle/>
+          <a:p>
+            <a:endParaRPr lang="th-TH"/>
+          </a:p>
+        </p:txBody>
       </p:sp>
       <p:sp>
         <p:nvSpPr>
@@ -5036,7 +4910,7 @@
           <a:bodyPr wrap="square" rtlCol="0" anchor="ctr"/>
           <a:lstStyle/>
           <a:p>
-            <a:pPr indent="0" marL="0">
+            <a:pPr marL="0" indent="0">
               <a:buNone/>
             </a:pPr>
             <a:r>
@@ -5075,7 +4949,7 @@
           <a:bodyPr wrap="square" rtlCol="0" anchor="ctr"/>
           <a:lstStyle/>
           <a:p>
-            <a:pPr indent="0" marL="0">
+            <a:pPr marL="0" indent="0">
               <a:buNone/>
             </a:pPr>
             <a:r>
@@ -5115,6 +4989,13 @@
             <a:prstDash val="solid"/>
           </a:ln>
         </p:spPr>
+        <p:txBody>
+          <a:bodyPr/>
+          <a:lstStyle/>
+          <a:p>
+            <a:endParaRPr lang="th-TH"/>
+          </a:p>
+        </p:txBody>
       </p:sp>
       <p:sp>
         <p:nvSpPr>
@@ -5137,7 +5018,7 @@
           <a:bodyPr wrap="square" rtlCol="0" anchor="ctr"/>
           <a:lstStyle/>
           <a:p>
-            <a:pPr indent="0" marL="0">
+            <a:pPr marL="0" indent="0">
               <a:buNone/>
             </a:pPr>
             <a:r>
@@ -5176,7 +5057,7 @@
           <a:bodyPr wrap="square" rtlCol="0" anchor="ctr"/>
           <a:lstStyle/>
           <a:p>
-            <a:pPr indent="0" marL="0">
+            <a:pPr marL="0" indent="0">
               <a:buNone/>
             </a:pPr>
             <a:r>
@@ -5216,6 +5097,13 @@
             <a:prstDash val="solid"/>
           </a:ln>
         </p:spPr>
+        <p:txBody>
+          <a:bodyPr/>
+          <a:lstStyle/>
+          <a:p>
+            <a:endParaRPr lang="th-TH"/>
+          </a:p>
+        </p:txBody>
       </p:sp>
       <p:sp>
         <p:nvSpPr>
@@ -5238,11 +5126,11 @@
           <a:bodyPr wrap="square" rtlCol="0" anchor="ctr"/>
           <a:lstStyle/>
           <a:p>
-            <a:pPr algn="r" indent="0" marL="0">
-              <a:buNone/>
-            </a:pPr>
-            <a:r>
-              <a:rPr lang="en-US" sz="1000" spc="200" kern="0" dirty="0">
+            <a:pPr marL="0" indent="0" algn="r">
+              <a:buNone/>
+            </a:pPr>
+            <a:r>
+              <a:rPr lang="en-US" sz="1000" kern="0" spc="200" dirty="0">
                 <a:solidFill>
                   <a:srgbClr val="6B7280"/>
                 </a:solidFill>
@@ -5272,6 +5160,7 @@
         <a:solidFill>
           <a:srgbClr val="FAFAFA"/>
         </a:solidFill>
+        <a:effectLst/>
       </p:bgPr>
     </p:bg>
     <p:spTree>
@@ -5309,11 +5198,11 @@
           <a:bodyPr wrap="square" rtlCol="0" anchor="ctr"/>
           <a:lstStyle/>
           <a:p>
-            <a:pPr indent="0" marL="0">
-              <a:buNone/>
-            </a:pPr>
-            <a:r>
-              <a:rPr lang="en-US" sz="1100" b="1" spc="400" kern="0" dirty="0">
+            <a:pPr marL="0" indent="0">
+              <a:buNone/>
+            </a:pPr>
+            <a:r>
+              <a:rPr lang="en-US" sz="1100" b="1" kern="0" spc="400" dirty="0">
                 <a:solidFill>
                   <a:srgbClr val="007FFF"/>
                 </a:solidFill>
@@ -5348,7 +5237,7 @@
           <a:bodyPr wrap="square" rtlCol="0" anchor="ctr"/>
           <a:lstStyle/>
           <a:p>
-            <a:pPr indent="0" marL="0">
+            <a:pPr marL="0" indent="0">
               <a:buNone/>
             </a:pPr>
             <a:r>
@@ -5387,7 +5276,7 @@
           <a:bodyPr wrap="square" rtlCol="0" anchor="ctr"/>
           <a:lstStyle/>
           <a:p>
-            <a:pPr algn="ctr" indent="0" marL="0">
+            <a:pPr marL="0" indent="0" algn="ctr">
               <a:buNone/>
             </a:pPr>
             <a:r>
@@ -5427,6 +5316,13 @@
             <a:prstDash val="solid"/>
           </a:ln>
         </p:spPr>
+        <p:txBody>
+          <a:bodyPr/>
+          <a:lstStyle/>
+          <a:p>
+            <a:endParaRPr lang="th-TH"/>
+          </a:p>
+        </p:txBody>
       </p:sp>
       <p:sp>
         <p:nvSpPr>
@@ -5449,7 +5345,7 @@
           <a:bodyPr wrap="square" rtlCol="0" anchor="ctr"/>
           <a:lstStyle/>
           <a:p>
-            <a:pPr algn="ctr" indent="0" marL="0">
+            <a:pPr marL="0" indent="0" algn="ctr">
               <a:buNone/>
             </a:pPr>
             <a:r>
@@ -5488,11 +5384,11 @@
           <a:bodyPr wrap="square" rtlCol="0" anchor="ctr"/>
           <a:lstStyle/>
           <a:p>
-            <a:pPr algn="r" indent="0" marL="0">
-              <a:buNone/>
-            </a:pPr>
-            <a:r>
-              <a:rPr lang="en-US" sz="1000" spc="200" kern="0" dirty="0">
+            <a:pPr marL="0" indent="0" algn="r">
+              <a:buNone/>
+            </a:pPr>
+            <a:r>
+              <a:rPr lang="en-US" sz="1000" kern="0" spc="200" dirty="0">
                 <a:solidFill>
                   <a:srgbClr val="6B7280"/>
                 </a:solidFill>
@@ -5522,6 +5418,7 @@
         <a:solidFill>
           <a:srgbClr val="FAFAFA"/>
         </a:solidFill>
+        <a:effectLst/>
       </p:bgPr>
     </p:bg>
     <p:spTree>
@@ -5559,11 +5456,11 @@
           <a:bodyPr wrap="square" rtlCol="0" anchor="ctr"/>
           <a:lstStyle/>
           <a:p>
-            <a:pPr indent="0" marL="0">
-              <a:buNone/>
-            </a:pPr>
-            <a:r>
-              <a:rPr lang="en-US" sz="1100" b="1" spc="400" kern="0" dirty="0">
+            <a:pPr marL="0" indent="0">
+              <a:buNone/>
+            </a:pPr>
+            <a:r>
+              <a:rPr lang="en-US" sz="1100" b="1" kern="0" spc="400" dirty="0">
                 <a:solidFill>
                   <a:srgbClr val="007FFF"/>
                 </a:solidFill>
@@ -5598,7 +5495,7 @@
           <a:bodyPr wrap="square" rtlCol="0" anchor="ctr"/>
           <a:lstStyle/>
           <a:p>
-            <a:pPr indent="0" marL="0">
+            <a:pPr marL="0" indent="0">
               <a:buNone/>
             </a:pPr>
             <a:r>
@@ -5637,11 +5534,11 @@
           <a:bodyPr wrap="square" rtlCol="0" anchor="ctr"/>
           <a:lstStyle/>
           <a:p>
-            <a:pPr indent="0" marL="0">
-              <a:buNone/>
-            </a:pPr>
-            <a:r>
-              <a:rPr lang="en-US" sz="1300" b="1" spc="300" kern="0" dirty="0">
+            <a:pPr marL="0" indent="0">
+              <a:buNone/>
+            </a:pPr>
+            <a:r>
+              <a:rPr lang="en-US" sz="1300" b="1" kern="0" spc="300" dirty="0">
                 <a:solidFill>
                   <a:srgbClr val="6B7280"/>
                 </a:solidFill>
@@ -5681,6 +5578,13 @@
             <a:prstDash val="solid"/>
           </a:ln>
         </p:spPr>
+        <p:txBody>
+          <a:bodyPr/>
+          <a:lstStyle/>
+          <a:p>
+            <a:endParaRPr lang="th-TH"/>
+          </a:p>
+        </p:txBody>
       </p:sp>
       <p:sp>
         <p:nvSpPr>
@@ -5703,7 +5607,7 @@
           <a:bodyPr wrap="square" rtlCol="0" anchor="ctr"/>
           <a:lstStyle/>
           <a:p>
-            <a:pPr indent="0" marL="0">
+            <a:pPr marL="0" indent="0">
               <a:buNone/>
             </a:pPr>
             <a:r>
@@ -5717,9 +5621,6 @@
               </a:rPr>
               <a:t>.btn </a:t>
             </a:r>
-            <a:pPr indent="0" marL="0">
-              <a:buNone/>
-            </a:pPr>
             <a:r>
               <a:rPr lang="en-US" sz="1200" dirty="0">
                 <a:solidFill>
@@ -5734,7 +5635,7 @@
             <a:endParaRPr lang="en-US" sz="1200" dirty="0"/>
           </a:p>
           <a:p>
-            <a:pPr indent="0" marL="0">
+            <a:pPr marL="0" indent="0">
               <a:buNone/>
             </a:pPr>
             <a:r>
@@ -5748,9 +5649,6 @@
               </a:rPr>
               <a:t>  background: </a:t>
             </a:r>
-            <a:pPr indent="0" marL="0">
-              <a:buNone/>
-            </a:pPr>
             <a:r>
               <a:rPr lang="en-US" sz="1200" dirty="0">
                 <a:solidFill>
@@ -5762,9 +5660,6 @@
               </a:rPr>
               <a:t>#1976d2</a:t>
             </a:r>
-            <a:pPr indent="0" marL="0">
-              <a:buNone/>
-            </a:pPr>
             <a:r>
               <a:rPr lang="en-US" sz="1200" dirty="0">
                 <a:solidFill>
@@ -5779,7 +5674,7 @@
             <a:endParaRPr lang="en-US" sz="1200" dirty="0"/>
           </a:p>
           <a:p>
-            <a:pPr indent="0" marL="0">
+            <a:pPr marL="0" indent="0">
               <a:buNone/>
             </a:pPr>
             <a:r>
@@ -5793,9 +5688,6 @@
               </a:rPr>
               <a:t>  color: </a:t>
             </a:r>
-            <a:pPr indent="0" marL="0">
-              <a:buNone/>
-            </a:pPr>
             <a:r>
               <a:rPr lang="en-US" sz="1200" dirty="0">
                 <a:solidFill>
@@ -5807,9 +5699,6 @@
               </a:rPr>
               <a:t>#fff</a:t>
             </a:r>
-            <a:pPr indent="0" marL="0">
-              <a:buNone/>
-            </a:pPr>
             <a:r>
               <a:rPr lang="en-US" sz="1200" dirty="0">
                 <a:solidFill>
@@ -5824,7 +5713,7 @@
             <a:endParaRPr lang="en-US" sz="1200" dirty="0"/>
           </a:p>
           <a:p>
-            <a:pPr indent="0" marL="0">
+            <a:pPr marL="0" indent="0">
               <a:buNone/>
             </a:pPr>
             <a:r>
@@ -5838,9 +5727,6 @@
               </a:rPr>
               <a:t>  padding: </a:t>
             </a:r>
-            <a:pPr indent="0" marL="0">
-              <a:buNone/>
-            </a:pPr>
             <a:r>
               <a:rPr lang="en-US" sz="1200" dirty="0">
                 <a:solidFill>
@@ -5852,9 +5738,6 @@
               </a:rPr>
               <a:t>8px 22px</a:t>
             </a:r>
-            <a:pPr indent="0" marL="0">
-              <a:buNone/>
-            </a:pPr>
             <a:r>
               <a:rPr lang="en-US" sz="1200" dirty="0">
                 <a:solidFill>
@@ -5869,7 +5752,7 @@
             <a:endParaRPr lang="en-US" sz="1200" dirty="0"/>
           </a:p>
           <a:p>
-            <a:pPr indent="0" marL="0">
+            <a:pPr marL="0" indent="0">
               <a:buNone/>
             </a:pPr>
             <a:r>
@@ -5883,9 +5766,6 @@
               </a:rPr>
               <a:t>  border: </a:t>
             </a:r>
-            <a:pPr indent="0" marL="0">
-              <a:buNone/>
-            </a:pPr>
             <a:r>
               <a:rPr lang="en-US" sz="1200" dirty="0">
                 <a:solidFill>
@@ -5897,9 +5777,6 @@
               </a:rPr>
               <a:t>none</a:t>
             </a:r>
-            <a:pPr indent="0" marL="0">
-              <a:buNone/>
-            </a:pPr>
             <a:r>
               <a:rPr lang="en-US" sz="1200" dirty="0">
                 <a:solidFill>
@@ -5914,7 +5791,7 @@
             <a:endParaRPr lang="en-US" sz="1200" dirty="0"/>
           </a:p>
           <a:p>
-            <a:pPr indent="0" marL="0">
+            <a:pPr marL="0" indent="0">
               <a:buNone/>
             </a:pPr>
             <a:r>
@@ -5928,9 +5805,6 @@
               </a:rPr>
               <a:t>  border-radius: </a:t>
             </a:r>
-            <a:pPr indent="0" marL="0">
-              <a:buNone/>
-            </a:pPr>
             <a:r>
               <a:rPr lang="en-US" sz="1200" dirty="0">
                 <a:solidFill>
@@ -5942,9 +5816,6 @@
               </a:rPr>
               <a:t>4px</a:t>
             </a:r>
-            <a:pPr indent="0" marL="0">
-              <a:buNone/>
-            </a:pPr>
             <a:r>
               <a:rPr lang="en-US" sz="1200" dirty="0">
                 <a:solidFill>
@@ -5959,7 +5830,7 @@
             <a:endParaRPr lang="en-US" sz="1200" dirty="0"/>
           </a:p>
           <a:p>
-            <a:pPr indent="0" marL="0">
+            <a:pPr marL="0" indent="0">
               <a:buNone/>
             </a:pPr>
             <a:r>
@@ -5973,9 +5844,6 @@
               </a:rPr>
               <a:t>  cursor: </a:t>
             </a:r>
-            <a:pPr indent="0" marL="0">
-              <a:buNone/>
-            </a:pPr>
             <a:r>
               <a:rPr lang="en-US" sz="1200" dirty="0">
                 <a:solidFill>
@@ -5987,9 +5855,6 @@
               </a:rPr>
               <a:t>pointer</a:t>
             </a:r>
-            <a:pPr indent="0" marL="0">
-              <a:buNone/>
-            </a:pPr>
             <a:r>
               <a:rPr lang="en-US" sz="1200" dirty="0">
                 <a:solidFill>
@@ -6004,7 +5869,7 @@
             <a:endParaRPr lang="en-US" sz="1200" dirty="0"/>
           </a:p>
           <a:p>
-            <a:pPr indent="0" marL="0">
+            <a:pPr marL="0" indent="0">
               <a:buNone/>
             </a:pPr>
             <a:r>
@@ -6018,9 +5883,6 @@
               </a:rPr>
               <a:t>  transition: </a:t>
             </a:r>
-            <a:pPr indent="0" marL="0">
-              <a:buNone/>
-            </a:pPr>
             <a:r>
               <a:rPr lang="en-US" sz="1200" dirty="0">
                 <a:solidFill>
@@ -6032,9 +5894,6 @@
               </a:rPr>
               <a:t>background .2s</a:t>
             </a:r>
-            <a:pPr indent="0" marL="0">
-              <a:buNone/>
-            </a:pPr>
             <a:r>
               <a:rPr lang="en-US" sz="1200" dirty="0">
                 <a:solidFill>
@@ -6049,7 +5908,7 @@
             <a:endParaRPr lang="en-US" sz="1200" dirty="0"/>
           </a:p>
           <a:p>
-            <a:pPr indent="0" marL="0">
+            <a:pPr marL="0" indent="0">
               <a:buNone/>
             </a:pPr>
             <a:r>
@@ -6066,7 +5925,7 @@
             <a:endParaRPr lang="en-US" sz="1200" dirty="0"/>
           </a:p>
           <a:p>
-            <a:pPr indent="0" marL="0">
+            <a:pPr marL="0" indent="0">
               <a:buNone/>
             </a:pPr>
             <a:r>
@@ -6080,9 +5939,6 @@
               </a:rPr>
               <a:t>.btn:hover </a:t>
             </a:r>
-            <a:pPr indent="0" marL="0">
-              <a:buNone/>
-            </a:pPr>
             <a:r>
               <a:rPr lang="en-US" sz="1200" dirty="0">
                 <a:solidFill>
@@ -6094,9 +5950,6 @@
               </a:rPr>
               <a:t>{ background: </a:t>
             </a:r>
-            <a:pPr indent="0" marL="0">
-              <a:buNone/>
-            </a:pPr>
             <a:r>
               <a:rPr lang="en-US" sz="1200" dirty="0">
                 <a:solidFill>
@@ -6108,9 +5961,6 @@
               </a:rPr>
               <a:t>#1565c0</a:t>
             </a:r>
-            <a:pPr indent="0" marL="0">
-              <a:buNone/>
-            </a:pPr>
             <a:r>
               <a:rPr lang="en-US" sz="1200" dirty="0">
                 <a:solidFill>
@@ -6125,7 +5975,7 @@
             <a:endParaRPr lang="en-US" sz="1200" dirty="0"/>
           </a:p>
           <a:p>
-            <a:pPr indent="0" marL="0">
+            <a:pPr marL="0" indent="0">
               <a:buNone/>
             </a:pPr>
             <a:r>
@@ -6139,9 +5989,6 @@
               </a:rPr>
               <a:t>.btn:focus-visible </a:t>
             </a:r>
-            <a:pPr indent="0" marL="0">
-              <a:buNone/>
-            </a:pPr>
             <a:r>
               <a:rPr lang="en-US" sz="1200" dirty="0">
                 <a:solidFill>
@@ -6153,9 +6000,6 @@
               </a:rPr>
               <a:t>{ outline: </a:t>
             </a:r>
-            <a:pPr indent="0" marL="0">
-              <a:buNone/>
-            </a:pPr>
             <a:r>
               <a:rPr lang="en-US" sz="1200" dirty="0">
                 <a:solidFill>
@@ -6167,9 +6011,6 @@
               </a:rPr>
               <a:t>2px solid #1976d2</a:t>
             </a:r>
-            <a:pPr indent="0" marL="0">
-              <a:buNone/>
-            </a:pPr>
             <a:r>
               <a:rPr lang="en-US" sz="1200" dirty="0">
                 <a:solidFill>
@@ -6184,13 +6025,13 @@
             <a:endParaRPr lang="en-US" sz="1200" dirty="0"/>
           </a:p>
           <a:p>
-            <a:pPr indent="0" marL="0">
+            <a:pPr marL="0" indent="0">
               <a:buNone/>
             </a:pPr>
             <a:endParaRPr lang="en-US" sz="1200" dirty="0"/>
           </a:p>
           <a:p>
-            <a:pPr indent="0" marL="0">
+            <a:pPr marL="0" indent="0">
               <a:buNone/>
             </a:pPr>
             <a:r>
@@ -6204,9 +6045,6 @@
               </a:rPr>
               <a:t>&lt;</a:t>
             </a:r>
-            <a:pPr indent="0" marL="0">
-              <a:buNone/>
-            </a:pPr>
             <a:r>
               <a:rPr lang="en-US" sz="1200" dirty="0">
                 <a:solidFill>
@@ -6218,9 +6056,6 @@
               </a:rPr>
               <a:t>button</a:t>
             </a:r>
-            <a:pPr indent="0" marL="0">
-              <a:buNone/>
-            </a:pPr>
             <a:r>
               <a:rPr lang="en-US" sz="1200" dirty="0">
                 <a:solidFill>
@@ -6232,9 +6067,6 @@
               </a:rPr>
               <a:t> class=</a:t>
             </a:r>
-            <a:pPr indent="0" marL="0">
-              <a:buNone/>
-            </a:pPr>
             <a:r>
               <a:rPr lang="en-US" sz="1200" dirty="0">
                 <a:solidFill>
@@ -6246,9 +6078,6 @@
               </a:rPr>
               <a:t>"btn"</a:t>
             </a:r>
-            <a:pPr indent="0" marL="0">
-              <a:buNone/>
-            </a:pPr>
             <a:r>
               <a:rPr lang="en-US" sz="1200" dirty="0">
                 <a:solidFill>
@@ -6260,9 +6089,6 @@
               </a:rPr>
               <a:t>&gt;Click Me&lt;/</a:t>
             </a:r>
-            <a:pPr indent="0" marL="0">
-              <a:buNone/>
-            </a:pPr>
             <a:r>
               <a:rPr lang="en-US" sz="1200" dirty="0">
                 <a:solidFill>
@@ -6274,9 +6100,6 @@
               </a:rPr>
               <a:t>button</a:t>
             </a:r>
-            <a:pPr indent="0" marL="0">
-              <a:buNone/>
-            </a:pPr>
             <a:r>
               <a:rPr lang="en-US" sz="1200" dirty="0">
                 <a:solidFill>
@@ -6313,7 +6136,7 @@
           <a:bodyPr wrap="square" rtlCol="0" anchor="ctr"/>
           <a:lstStyle/>
           <a:p>
-            <a:pPr indent="0" marL="0">
+            <a:pPr marL="0" indent="0">
               <a:buNone/>
             </a:pPr>
             <a:r>
@@ -6352,11 +6175,11 @@
           <a:bodyPr wrap="square" rtlCol="0" anchor="ctr"/>
           <a:lstStyle/>
           <a:p>
-            <a:pPr indent="0" marL="0">
-              <a:buNone/>
-            </a:pPr>
-            <a:r>
-              <a:rPr lang="en-US" sz="1300" b="1" spc="300" kern="0" dirty="0">
+            <a:pPr marL="0" indent="0">
+              <a:buNone/>
+            </a:pPr>
+            <a:r>
+              <a:rPr lang="en-US" sz="1300" b="1" kern="0" spc="300" dirty="0">
                 <a:solidFill>
                   <a:srgbClr val="007FFF"/>
                 </a:solidFill>
@@ -6396,6 +6219,13 @@
             <a:prstDash val="solid"/>
           </a:ln>
         </p:spPr>
+        <p:txBody>
+          <a:bodyPr/>
+          <a:lstStyle/>
+          <a:p>
+            <a:endParaRPr lang="th-TH"/>
+          </a:p>
+        </p:txBody>
       </p:sp>
       <p:sp>
         <p:nvSpPr>
@@ -6418,7 +6248,7 @@
           <a:bodyPr wrap="square" rtlCol="0" anchor="ctr"/>
           <a:lstStyle/>
           <a:p>
-            <a:pPr indent="0" marL="0">
+            <a:pPr marL="0" indent="0">
               <a:buNone/>
             </a:pPr>
             <a:r>
@@ -6432,9 +6262,6 @@
               </a:rPr>
               <a:t>import </a:t>
             </a:r>
-            <a:pPr indent="0" marL="0">
-              <a:buNone/>
-            </a:pPr>
             <a:r>
               <a:rPr lang="en-US" sz="1600" dirty="0">
                 <a:solidFill>
@@ -6446,9 +6273,6 @@
               </a:rPr>
               <a:t>{ Button } </a:t>
             </a:r>
-            <a:pPr indent="0" marL="0">
-              <a:buNone/>
-            </a:pPr>
             <a:r>
               <a:rPr lang="en-US" sz="1600" dirty="0">
                 <a:solidFill>
@@ -6460,9 +6284,6 @@
               </a:rPr>
               <a:t>from </a:t>
             </a:r>
-            <a:pPr indent="0" marL="0">
-              <a:buNone/>
-            </a:pPr>
             <a:r>
               <a:rPr lang="en-US" sz="1600" dirty="0">
                 <a:solidFill>
@@ -6474,9 +6295,6 @@
               </a:rPr>
               <a:t>'@mui/material'</a:t>
             </a:r>
-            <a:pPr indent="0" marL="0">
-              <a:buNone/>
-            </a:pPr>
             <a:r>
               <a:rPr lang="en-US" sz="1600" dirty="0">
                 <a:solidFill>
@@ -6491,13 +6309,13 @@
             <a:endParaRPr lang="en-US" sz="1600" dirty="0"/>
           </a:p>
           <a:p>
-            <a:pPr indent="0" marL="0">
+            <a:pPr marL="0" indent="0">
               <a:buNone/>
             </a:pPr>
             <a:endParaRPr lang="en-US" sz="1600" dirty="0"/>
           </a:p>
           <a:p>
-            <a:pPr indent="0" marL="0">
+            <a:pPr marL="0" indent="0">
               <a:buNone/>
             </a:pPr>
             <a:r>
@@ -6511,9 +6329,6 @@
               </a:rPr>
               <a:t>&lt;</a:t>
             </a:r>
-            <a:pPr indent="0" marL="0">
-              <a:buNone/>
-            </a:pPr>
             <a:r>
               <a:rPr lang="en-US" sz="1600" dirty="0">
                 <a:solidFill>
@@ -6525,9 +6340,6 @@
               </a:rPr>
               <a:t>Button </a:t>
             </a:r>
-            <a:pPr indent="0" marL="0">
-              <a:buNone/>
-            </a:pPr>
             <a:r>
               <a:rPr lang="en-US" sz="1600" dirty="0">
                 <a:solidFill>
@@ -6539,9 +6351,6 @@
               </a:rPr>
               <a:t>variant</a:t>
             </a:r>
-            <a:pPr indent="0" marL="0">
-              <a:buNone/>
-            </a:pPr>
             <a:r>
               <a:rPr lang="en-US" sz="1600" dirty="0">
                 <a:solidFill>
@@ -6553,9 +6362,6 @@
               </a:rPr>
               <a:t>=</a:t>
             </a:r>
-            <a:pPr indent="0" marL="0">
-              <a:buNone/>
-            </a:pPr>
             <a:r>
               <a:rPr lang="en-US" sz="1600" dirty="0">
                 <a:solidFill>
@@ -6567,9 +6373,6 @@
               </a:rPr>
               <a:t>"contained"</a:t>
             </a:r>
-            <a:pPr indent="0" marL="0">
-              <a:buNone/>
-            </a:pPr>
             <a:r>
               <a:rPr lang="en-US" sz="1600" dirty="0">
                 <a:solidFill>
@@ -6581,9 +6384,6 @@
               </a:rPr>
               <a:t> </a:t>
             </a:r>
-            <a:pPr indent="0" marL="0">
-              <a:buNone/>
-            </a:pPr>
             <a:r>
               <a:rPr lang="en-US" sz="1600" dirty="0">
                 <a:solidFill>
@@ -6595,9 +6395,6 @@
               </a:rPr>
               <a:t>color</a:t>
             </a:r>
-            <a:pPr indent="0" marL="0">
-              <a:buNone/>
-            </a:pPr>
             <a:r>
               <a:rPr lang="en-US" sz="1600" dirty="0">
                 <a:solidFill>
@@ -6609,9 +6406,6 @@
               </a:rPr>
               <a:t>=</a:t>
             </a:r>
-            <a:pPr indent="0" marL="0">
-              <a:buNone/>
-            </a:pPr>
             <a:r>
               <a:rPr lang="en-US" sz="1600" dirty="0">
                 <a:solidFill>
@@ -6623,9 +6417,6 @@
               </a:rPr>
               <a:t>"primary"</a:t>
             </a:r>
-            <a:pPr indent="0" marL="0">
-              <a:buNone/>
-            </a:pPr>
             <a:r>
               <a:rPr lang="en-US" sz="1600" dirty="0">
                 <a:solidFill>
@@ -6640,7 +6431,7 @@
             <a:endParaRPr lang="en-US" sz="1600" dirty="0"/>
           </a:p>
           <a:p>
-            <a:pPr indent="0" marL="0">
+            <a:pPr marL="0" indent="0">
               <a:buNone/>
             </a:pPr>
             <a:r>
@@ -6657,7 +6448,7 @@
             <a:endParaRPr lang="en-US" sz="1600" dirty="0"/>
           </a:p>
           <a:p>
-            <a:pPr indent="0" marL="0">
+            <a:pPr marL="0" indent="0">
               <a:buNone/>
             </a:pPr>
             <a:r>
@@ -6671,9 +6462,6 @@
               </a:rPr>
               <a:t>&lt;/</a:t>
             </a:r>
-            <a:pPr indent="0" marL="0">
-              <a:buNone/>
-            </a:pPr>
             <a:r>
               <a:rPr lang="en-US" sz="1600" dirty="0">
                 <a:solidFill>
@@ -6685,9 +6473,6 @@
               </a:rPr>
               <a:t>Button</a:t>
             </a:r>
-            <a:pPr indent="0" marL="0">
-              <a:buNone/>
-            </a:pPr>
             <a:r>
               <a:rPr lang="en-US" sz="1600" dirty="0">
                 <a:solidFill>
@@ -6724,7 +6509,7 @@
           <a:bodyPr wrap="square" rtlCol="0" anchor="ctr"/>
           <a:lstStyle/>
           <a:p>
-            <a:pPr indent="0" marL="0">
+            <a:pPr marL="0" indent="0">
               <a:buNone/>
             </a:pPr>
             <a:r>
@@ -6763,11 +6548,11 @@
           <a:bodyPr wrap="square" rtlCol="0" anchor="ctr"/>
           <a:lstStyle/>
           <a:p>
-            <a:pPr algn="r" indent="0" marL="0">
-              <a:buNone/>
-            </a:pPr>
-            <a:r>
-              <a:rPr lang="en-US" sz="1000" spc="200" kern="0" dirty="0">
+            <a:pPr marL="0" indent="0" algn="r">
+              <a:buNone/>
+            </a:pPr>
+            <a:r>
+              <a:rPr lang="en-US" sz="1000" kern="0" spc="200" dirty="0">
                 <a:solidFill>
                   <a:srgbClr val="6B7280"/>
                 </a:solidFill>
@@ -7082,4 +6867,319 @@
     </a:ext>
   </a:extLst>
 </a:theme>
+</file>
+
+<file path=ppt/theme/theme2.xml><?xml version="1.0" encoding="utf-8"?>
+<a:theme xmlns:a="http://schemas.openxmlformats.org/drawingml/2006/main" name="Office Theme">
+  <a:themeElements>
+    <a:clrScheme name="Office">
+      <a:dk1>
+        <a:sysClr val="windowText" lastClr="000000"/>
+      </a:dk1>
+      <a:lt1>
+        <a:sysClr val="window" lastClr="FFFFFF"/>
+      </a:lt1>
+      <a:dk2>
+        <a:srgbClr val="0E2841"/>
+      </a:dk2>
+      <a:lt2>
+        <a:srgbClr val="E8E8E8"/>
+      </a:lt2>
+      <a:accent1>
+        <a:srgbClr val="156082"/>
+      </a:accent1>
+      <a:accent2>
+        <a:srgbClr val="E97132"/>
+      </a:accent2>
+      <a:accent3>
+        <a:srgbClr val="196B24"/>
+      </a:accent3>
+      <a:accent4>
+        <a:srgbClr val="0F9ED5"/>
+      </a:accent4>
+      <a:accent5>
+        <a:srgbClr val="A02B93"/>
+      </a:accent5>
+      <a:accent6>
+        <a:srgbClr val="4EA72E"/>
+      </a:accent6>
+      <a:hlink>
+        <a:srgbClr val="467886"/>
+      </a:hlink>
+      <a:folHlink>
+        <a:srgbClr val="96607D"/>
+      </a:folHlink>
+    </a:clrScheme>
+    <a:fontScheme name="Office">
+      <a:majorFont>
+        <a:latin typeface="Aptos Display" panose="02110004020202020204"/>
+        <a:ea typeface=""/>
+        <a:cs typeface=""/>
+        <a:font script="Jpan" typeface="游ゴシック Light"/>
+        <a:font script="Hang" typeface="맑은 고딕"/>
+        <a:font script="Hans" typeface="等线 Light"/>
+        <a:font script="Hant" typeface="新細明體"/>
+        <a:font script="Arab" typeface="Times New Roman"/>
+        <a:font script="Hebr" typeface="Times New Roman"/>
+        <a:font script="Thai" typeface="Angsana New"/>
+        <a:font script="Ethi" typeface="Nyala"/>
+        <a:font script="Beng" typeface="Vrinda"/>
+        <a:font script="Gujr" typeface="Shruti"/>
+        <a:font script="Khmr" typeface="MoolBoran"/>
+        <a:font script="Knda" typeface="Tunga"/>
+        <a:font script="Guru" typeface="Raavi"/>
+        <a:font script="Cans" typeface="Euphemia"/>
+        <a:font script="Cher" typeface="Plantagenet Cherokee"/>
+        <a:font script="Yiii" typeface="Microsoft Yi Baiti"/>
+        <a:font script="Tibt" typeface="Microsoft Himalaya"/>
+        <a:font script="Thaa" typeface="MV Boli"/>
+        <a:font script="Deva" typeface="Mangal"/>
+        <a:font script="Telu" typeface="Gautami"/>
+        <a:font script="Taml" typeface="Latha"/>
+        <a:font script="Syrc" typeface="Estrangelo Edessa"/>
+        <a:font script="Orya" typeface="Kalinga"/>
+        <a:font script="Mlym" typeface="Kartika"/>
+        <a:font script="Laoo" typeface="DokChampa"/>
+        <a:font script="Sinh" typeface="Iskoola Pota"/>
+        <a:font script="Mong" typeface="Mongolian Baiti"/>
+        <a:font script="Viet" typeface="Times New Roman"/>
+        <a:font script="Uigh" typeface="Microsoft Uighur"/>
+        <a:font script="Geor" typeface="Sylfaen"/>
+        <a:font script="Armn" typeface="Arial"/>
+        <a:font script="Bugi" typeface="Leelawadee UI"/>
+        <a:font script="Bopo" typeface="Microsoft JhengHei"/>
+        <a:font script="Java" typeface="Javanese Text"/>
+        <a:font script="Lisu" typeface="Segoe UI"/>
+        <a:font script="Mymr" typeface="Myanmar Text"/>
+        <a:font script="Nkoo" typeface="Ebrima"/>
+        <a:font script="Olck" typeface="Nirmala UI"/>
+        <a:font script="Osma" typeface="Ebrima"/>
+        <a:font script="Phag" typeface="Phagspa"/>
+        <a:font script="Syrn" typeface="Estrangelo Edessa"/>
+        <a:font script="Syrj" typeface="Estrangelo Edessa"/>
+        <a:font script="Syre" typeface="Estrangelo Edessa"/>
+        <a:font script="Sora" typeface="Nirmala UI"/>
+        <a:font script="Tale" typeface="Microsoft Tai Le"/>
+        <a:font script="Talu" typeface="Microsoft New Tai Lue"/>
+        <a:font script="Tfng" typeface="Ebrima"/>
+      </a:majorFont>
+      <a:minorFont>
+        <a:latin typeface="Aptos" panose="02110004020202020204"/>
+        <a:ea typeface=""/>
+        <a:cs typeface=""/>
+        <a:font script="Jpan" typeface="游ゴシック"/>
+        <a:font script="Hang" typeface="맑은 고딕"/>
+        <a:font script="Hans" typeface="等线"/>
+        <a:font script="Hant" typeface="新細明體"/>
+        <a:font script="Arab" typeface="Arial"/>
+        <a:font script="Hebr" typeface="Arial"/>
+        <a:font script="Thai" typeface="Cordia New"/>
+        <a:font script="Ethi" typeface="Nyala"/>
+        <a:font script="Beng" typeface="Vrinda"/>
+        <a:font script="Gujr" typeface="Shruti"/>
+        <a:font script="Khmr" typeface="DaunPenh"/>
+        <a:font script="Knda" typeface="Tunga"/>
+        <a:font script="Guru" typeface="Raavi"/>
+        <a:font script="Cans" typeface="Euphemia"/>
+        <a:font script="Cher" typeface="Plantagenet Cherokee"/>
+        <a:font script="Yiii" typeface="Microsoft Yi Baiti"/>
+        <a:font script="Tibt" typeface="Microsoft Himalaya"/>
+        <a:font script="Thaa" typeface="MV Boli"/>
+        <a:font script="Deva" typeface="Mangal"/>
+        <a:font script="Telu" typeface="Gautami"/>
+        <a:font script="Taml" typeface="Latha"/>
+        <a:font script="Syrc" typeface="Estrangelo Edessa"/>
+        <a:font script="Orya" typeface="Kalinga"/>
+        <a:font script="Mlym" typeface="Kartika"/>
+        <a:font script="Laoo" typeface="DokChampa"/>
+        <a:font script="Sinh" typeface="Iskoola Pota"/>
+        <a:font script="Mong" typeface="Mongolian Baiti"/>
+        <a:font script="Viet" typeface="Arial"/>
+        <a:font script="Uigh" typeface="Microsoft Uighur"/>
+        <a:font script="Geor" typeface="Sylfaen"/>
+        <a:font script="Armn" typeface="Arial"/>
+        <a:font script="Bugi" typeface="Leelawadee UI"/>
+        <a:font script="Bopo" typeface="Microsoft JhengHei"/>
+        <a:font script="Java" typeface="Javanese Text"/>
+        <a:font script="Lisu" typeface="Segoe UI"/>
+        <a:font script="Mymr" typeface="Myanmar Text"/>
+        <a:font script="Nkoo" typeface="Ebrima"/>
+        <a:font script="Olck" typeface="Nirmala UI"/>
+        <a:font script="Osma" typeface="Ebrima"/>
+        <a:font script="Phag" typeface="Phagspa"/>
+        <a:font script="Syrn" typeface="Estrangelo Edessa"/>
+        <a:font script="Syrj" typeface="Estrangelo Edessa"/>
+        <a:font script="Syre" typeface="Estrangelo Edessa"/>
+        <a:font script="Sora" typeface="Nirmala UI"/>
+        <a:font script="Tale" typeface="Microsoft Tai Le"/>
+        <a:font script="Talu" typeface="Microsoft New Tai Lue"/>
+        <a:font script="Tfng" typeface="Ebrima"/>
+      </a:minorFont>
+    </a:fontScheme>
+    <a:fmtScheme name="Office">
+      <a:fillStyleLst>
+        <a:solidFill>
+          <a:schemeClr val="phClr"/>
+        </a:solidFill>
+        <a:gradFill rotWithShape="1">
+          <a:gsLst>
+            <a:gs pos="0">
+              <a:schemeClr val="phClr">
+                <a:lumMod val="110000"/>
+                <a:satMod val="105000"/>
+                <a:tint val="67000"/>
+              </a:schemeClr>
+            </a:gs>
+            <a:gs pos="50000">
+              <a:schemeClr val="phClr">
+                <a:lumMod val="105000"/>
+                <a:satMod val="103000"/>
+                <a:tint val="73000"/>
+              </a:schemeClr>
+            </a:gs>
+            <a:gs pos="100000">
+              <a:schemeClr val="phClr">
+                <a:lumMod val="105000"/>
+                <a:satMod val="109000"/>
+                <a:tint val="81000"/>
+              </a:schemeClr>
+            </a:gs>
+          </a:gsLst>
+          <a:lin ang="5400000" scaled="0"/>
+        </a:gradFill>
+        <a:gradFill rotWithShape="1">
+          <a:gsLst>
+            <a:gs pos="0">
+              <a:schemeClr val="phClr">
+                <a:satMod val="103000"/>
+                <a:lumMod val="102000"/>
+                <a:tint val="94000"/>
+              </a:schemeClr>
+            </a:gs>
+            <a:gs pos="50000">
+              <a:schemeClr val="phClr">
+                <a:satMod val="110000"/>
+                <a:lumMod val="100000"/>
+                <a:shade val="100000"/>
+              </a:schemeClr>
+            </a:gs>
+            <a:gs pos="100000">
+              <a:schemeClr val="phClr">
+                <a:lumMod val="99000"/>
+                <a:satMod val="120000"/>
+                <a:shade val="78000"/>
+              </a:schemeClr>
+            </a:gs>
+          </a:gsLst>
+          <a:lin ang="5400000" scaled="0"/>
+        </a:gradFill>
+      </a:fillStyleLst>
+      <a:lnStyleLst>
+        <a:ln w="12700" cap="flat" cmpd="sng" algn="ctr">
+          <a:solidFill>
+            <a:schemeClr val="phClr"/>
+          </a:solidFill>
+          <a:prstDash val="solid"/>
+          <a:miter lim="800000"/>
+        </a:ln>
+        <a:ln w="19050" cap="flat" cmpd="sng" algn="ctr">
+          <a:solidFill>
+            <a:schemeClr val="phClr"/>
+          </a:solidFill>
+          <a:prstDash val="solid"/>
+          <a:miter lim="800000"/>
+        </a:ln>
+        <a:ln w="25400" cap="flat" cmpd="sng" algn="ctr">
+          <a:solidFill>
+            <a:schemeClr val="phClr"/>
+          </a:solidFill>
+          <a:prstDash val="solid"/>
+          <a:miter lim="800000"/>
+        </a:ln>
+      </a:lnStyleLst>
+      <a:effectStyleLst>
+        <a:effectStyle>
+          <a:effectLst/>
+        </a:effectStyle>
+        <a:effectStyle>
+          <a:effectLst/>
+        </a:effectStyle>
+        <a:effectStyle>
+          <a:effectLst>
+            <a:outerShdw blurRad="57150" dist="19050" dir="5400000" algn="ctr" rotWithShape="0">
+              <a:srgbClr val="000000">
+                <a:alpha val="63000"/>
+              </a:srgbClr>
+            </a:outerShdw>
+          </a:effectLst>
+        </a:effectStyle>
+      </a:effectStyleLst>
+      <a:bgFillStyleLst>
+        <a:solidFill>
+          <a:schemeClr val="phClr"/>
+        </a:solidFill>
+        <a:solidFill>
+          <a:schemeClr val="phClr">
+            <a:tint val="95000"/>
+            <a:satMod val="170000"/>
+          </a:schemeClr>
+        </a:solidFill>
+        <a:gradFill rotWithShape="1">
+          <a:gsLst>
+            <a:gs pos="0">
+              <a:schemeClr val="phClr">
+                <a:tint val="93000"/>
+                <a:satMod val="150000"/>
+                <a:shade val="98000"/>
+                <a:lumMod val="102000"/>
+              </a:schemeClr>
+            </a:gs>
+            <a:gs pos="50000">
+              <a:schemeClr val="phClr">
+                <a:tint val="98000"/>
+                <a:satMod val="130000"/>
+                <a:shade val="90000"/>
+                <a:lumMod val="103000"/>
+              </a:schemeClr>
+            </a:gs>
+            <a:gs pos="100000">
+              <a:schemeClr val="phClr">
+                <a:shade val="63000"/>
+                <a:satMod val="120000"/>
+              </a:schemeClr>
+            </a:gs>
+          </a:gsLst>
+          <a:lin ang="5400000" scaled="0"/>
+        </a:gradFill>
+      </a:bgFillStyleLst>
+    </a:fmtScheme>
+  </a:themeElements>
+  <a:objectDefaults>
+    <a:lnDef>
+      <a:spPr/>
+      <a:bodyPr/>
+      <a:lstStyle/>
+      <a:style>
+        <a:lnRef idx="2">
+          <a:schemeClr val="accent1"/>
+        </a:lnRef>
+        <a:fillRef idx="0">
+          <a:schemeClr val="accent1"/>
+        </a:fillRef>
+        <a:effectRef idx="1">
+          <a:schemeClr val="accent1"/>
+        </a:effectRef>
+        <a:fontRef idx="minor">
+          <a:schemeClr val="tx1"/>
+        </a:fontRef>
+      </a:style>
+    </a:lnDef>
+  </a:objectDefaults>
+  <a:extraClrSchemeLst/>
+  <a:extLst>
+    <a:ext uri="{05A4C25C-085E-4340-85A3-A5531E510DB2}">
+      <thm15:themeFamily xmlns:thm15="http://schemas.microsoft.com/office/thememl/2012/main" name="Office Theme" id="{2E142A2C-CD16-42D6-873A-C26D2A0506FA}" vid="{1BDDFF52-6CD6-40A5-AB3C-68EB2F1E4D0A}"/>
+    </a:ext>
+  </a:extLst>
+</a:theme>
 </file>